--- a/slides/K562_enhancer_prediction.pptx
+++ b/slides/K562_enhancer_prediction.pptx
@@ -161,7 +161,7 @@
     </p:spTree>
     <p:extLst>
       <p:ext uri="{BB962C8B-B14F-4D97-AF65-F5344CB8AC3E}">
-        <p14:creationId xmlns:p14="http://schemas.microsoft.com/office/powerpoint/2010/main" val="3164649892"/>
+        <p14:creationId xmlns:p14="http://schemas.microsoft.com/office/powerpoint/2010/main" val="4058885551"/>
       </p:ext>
     </p:extLst>
   </p:cSld>
@@ -502,54 +502,77 @@
           <a:lstStyle/>
           <a:p>
             <a:r>
+              <a:rPr dirty="0"/>
               <a:t>To wrap up, I want to be careful about what this experiment shows and what it doesn't.</a:t>
             </a:r>
           </a:p>
           <a:p>
-            <a:endParaRPr/>
-          </a:p>
-          <a:p>
-            <a:r>
+            <a:endParaRPr dirty="0"/>
+          </a:p>
+          <a:p>
+            <a:r>
+              <a:rPr dirty="0"/>
               <a:t>What it shows: when you take the Puffin-D architecture and train it on K562 enhancer labels, pretraining from Puffin-D's promoter-task weights leads to a model that consistently outperforms training from random initialization on the same data. AUPRC goes from 0.168 to 0.269, a roughly 60 percent relative improvement. AUROC improves from 0.879 to 0.923. The improvement holds across decision thresholds, across both enhancer subtypes, and under both lenient and strict peak-matching rules. So the pretrained-vs-from-scratch comparison is internally consistent.</a:t>
             </a:r>
           </a:p>
           <a:p>
-            <a:endParaRPr/>
-          </a:p>
-          <a:p>
-            <a:r>
+            <a:endParaRPr dirty="0"/>
+          </a:p>
+          <a:p>
+            <a:r>
+              <a:rPr dirty="0"/>
               <a:t>What it doesn't show is whether the model is actually useful. The AUPRC of 0.269 sounds impressive when described as 21 times above chance, but the absolute number is what matters for whether anyone could use this. At threshold 0.5, the model's precision is 18 percent, meaning four out of five positive predictions are wrong. This is far below what a researcher would need to use the model for discovery applications, like flagging candidate enhancers for experimental validation.</a:t>
             </a:r>
           </a:p>
           <a:p>
-            <a:endParaRPr/>
-          </a:p>
-          <a:p>
-            <a:r>
-              <a:t>There are other things this experiment can't conclude. I didn't compare against simpler baselines like logistic regression on sequence composition, or smaller CNNs. So I can't claim Puffin-D is the right architecture for this task, only that this particular Puffin-D setup beats random initialization. I also only ran one training run per condition. Deep learning results can vary substantially across random seeds, so without multiple seeds I can't put error bars on the comparison. The improvement might be 60 percent, but it could be 40 or 80 across different seeds. We just don't know. And the slightly bigger gain on dELS than pELS, which I framed earlier as suggestive of real biological transfer, could equally be a general property of pretrained models, which tend to help more on harder tasks regardless of biology.</a:t>
-            </a:r>
-          </a:p>
-          <a:p>
-            <a:endParaRPr/>
-          </a:p>
-          <a:p>
-            <a:r>
+            <a:endParaRPr dirty="0"/>
+          </a:p>
+          <a:p>
+            <a:r>
+              <a:rPr dirty="0"/>
+              <a:t>There are other things this experiment can't conclude. I didn't compare against simpler baselines like logistic regression on sequence composition, or smaller CNNs. So I can't claim Puffin-D is the right architecture for this task, only that this particular Puffin-D setup beats random initialization. I also only ran one training run per condition. Deep learning results can vary substantially across random seeds, so without multiple seeds I can't put error bars on the comparison. The improvement might be 60 percent, but it could be 40 or 80 across different seeds. We just don't know. And the slightly bigger gain on </a:t>
+            </a:r>
+            <a:r>
+              <a:rPr dirty="0" err="1"/>
+              <a:t>dELS</a:t>
+            </a:r>
+            <a:r>
+              <a:rPr dirty="0"/>
+              <a:t> than </a:t>
+            </a:r>
+            <a:r>
+              <a:rPr dirty="0" err="1"/>
+              <a:t>pELS</a:t>
+            </a:r>
+            <a:r>
+              <a:rPr dirty="0"/>
+              <a:t>, which I framed earlier as suggestive of real biological transfer, could equally be a general property of pretrained models, which tend to help more on harder tasks regardless of biology.</a:t>
+            </a:r>
+          </a:p>
+          <a:p>
+            <a:endParaRPr dirty="0"/>
+          </a:p>
+          <a:p>
+            <a:r>
+              <a:rPr dirty="0"/>
               <a:t>The more interesting scientific finding from this work is probably the interpretation analysis. Both models, even though they perform differently in absolute terms, learn the same kind of representations: compositional features like GC content and CpG context, rather than specific TF binding motifs. We confirmed this with in silico mutagenesis and a peak-realignment test that I described in the previous slide. This tells us something about what Puffin-D-style CNNs capture. They're good at recognizing where regulatory regions are, but not at identifying which specific transcription factors are binding there. This is a useful methodological observation about the class of architecture, regardless of whether the specific predictor is useful.</a:t>
             </a:r>
           </a:p>
           <a:p>
-            <a:endParaRPr/>
-          </a:p>
-          <a:p>
-            <a:r>
+            <a:endParaRPr dirty="0"/>
+          </a:p>
+          <a:p>
+            <a:r>
+              <a:rPr dirty="0"/>
               <a:t>For limitations and future directions: more training seeds, baseline architecture comparisons, a larger validation set, wider ISM windows, and motif-aware training objectives are all worth pursuing.</a:t>
             </a:r>
           </a:p>
           <a:p>
-            <a:endParaRPr/>
-          </a:p>
-          <a:p>
-            <a:r>
+            <a:endParaRPr dirty="0"/>
+          </a:p>
+          <a:p>
+            <a:r>
+              <a:rPr dirty="0"/>
               <a:t>The code and all results are at the GitHub link shown. Thanks for listening, I'm happy to take questions.</a:t>
             </a:r>
           </a:p>
@@ -840,7 +863,7 @@
           </a:p>
           <a:p>
             <a:r>
-              <a:t>The question I'm testing here is whether this architecture and its learned representations work for a related but distinct task: enhancer prediction. Promoters and enhancers share the same fundamental machinery: transcription factors binding short motifs in DNA, embedded in regional compositional context. But they differ in important ways. Promoters always sit at gene starts; enhancers can be hundreds of kilobases away. Promoters tend to be uniformly GC-rich; enhancer composition varies more by cell type and tissue. So if Puffin-D works for enhancers, it suggests the architecture has learned something general about how regulatory DNA looks. If it doesn't, that would suggest the architecture is too specialized.</a:t>
+              <a:t>On the right side of the slide I've broken out the structural details into bullets so the architecture is concrete: a 100 kilobase one-hot DNA input, dilated convolutions throughout the network, the double U-Net layout with skip connections, and per-base outputs across the input window.</a:t>
             </a:r>
           </a:p>
           <a:p>
@@ -848,7 +871,7 @@
           </a:p>
           <a:p>
             <a:r>
-              <a:t>In the next slide I'll show how I adapted it for the K562 enhancer task and what the training setup looked like.</a:t>
+              <a:t>In the next slide I'll show how I adapted this architecture for the K562 enhancer task and what the training setup looked like.</a:t>
             </a:r>
           </a:p>
         </p:txBody>
@@ -1634,7 +1657,7 @@
           <a:p>
             <a:fld id="{5BCAD085-E8A6-8845-BD4E-CB4CCA059FC4}" type="datetimeFigureOut">
               <a:rPr lang="en-US" smtClean="0"/>
-              <a:t>5/17/26</a:t>
+              <a:t>5/18/26</a:t>
             </a:fld>
             <a:endParaRPr lang="en-US"/>
           </a:p>
@@ -1802,7 +1825,7 @@
           <a:p>
             <a:fld id="{5BCAD085-E8A6-8845-BD4E-CB4CCA059FC4}" type="datetimeFigureOut">
               <a:rPr lang="en-US" smtClean="0"/>
-              <a:t>5/17/26</a:t>
+              <a:t>5/18/26</a:t>
             </a:fld>
             <a:endParaRPr lang="en-US"/>
           </a:p>
@@ -1980,7 +2003,7 @@
           <a:p>
             <a:fld id="{5BCAD085-E8A6-8845-BD4E-CB4CCA059FC4}" type="datetimeFigureOut">
               <a:rPr lang="en-US" smtClean="0"/>
-              <a:t>5/17/26</a:t>
+              <a:t>5/18/26</a:t>
             </a:fld>
             <a:endParaRPr lang="en-US"/>
           </a:p>
@@ -2148,7 +2171,7 @@
           <a:p>
             <a:fld id="{5BCAD085-E8A6-8845-BD4E-CB4CCA059FC4}" type="datetimeFigureOut">
               <a:rPr lang="en-US" smtClean="0"/>
-              <a:t>5/17/26</a:t>
+              <a:t>5/18/26</a:t>
             </a:fld>
             <a:endParaRPr lang="en-US"/>
           </a:p>
@@ -2393,7 +2416,7 @@
           <a:p>
             <a:fld id="{5BCAD085-E8A6-8845-BD4E-CB4CCA059FC4}" type="datetimeFigureOut">
               <a:rPr lang="en-US" smtClean="0"/>
-              <a:t>5/17/26</a:t>
+              <a:t>5/18/26</a:t>
             </a:fld>
             <a:endParaRPr lang="en-US"/>
           </a:p>
@@ -2678,7 +2701,7 @@
           <a:p>
             <a:fld id="{5BCAD085-E8A6-8845-BD4E-CB4CCA059FC4}" type="datetimeFigureOut">
               <a:rPr lang="en-US" smtClean="0"/>
-              <a:t>5/17/26</a:t>
+              <a:t>5/18/26</a:t>
             </a:fld>
             <a:endParaRPr lang="en-US"/>
           </a:p>
@@ -3097,7 +3120,7 @@
           <a:p>
             <a:fld id="{5BCAD085-E8A6-8845-BD4E-CB4CCA059FC4}" type="datetimeFigureOut">
               <a:rPr lang="en-US" smtClean="0"/>
-              <a:t>5/17/26</a:t>
+              <a:t>5/18/26</a:t>
             </a:fld>
             <a:endParaRPr lang="en-US"/>
           </a:p>
@@ -3214,7 +3237,7 @@
           <a:p>
             <a:fld id="{5BCAD085-E8A6-8845-BD4E-CB4CCA059FC4}" type="datetimeFigureOut">
               <a:rPr lang="en-US" smtClean="0"/>
-              <a:t>5/17/26</a:t>
+              <a:t>5/18/26</a:t>
             </a:fld>
             <a:endParaRPr lang="en-US"/>
           </a:p>
@@ -3309,7 +3332,7 @@
           <a:p>
             <a:fld id="{5BCAD085-E8A6-8845-BD4E-CB4CCA059FC4}" type="datetimeFigureOut">
               <a:rPr lang="en-US" smtClean="0"/>
-              <a:t>5/17/26</a:t>
+              <a:t>5/18/26</a:t>
             </a:fld>
             <a:endParaRPr lang="en-US"/>
           </a:p>
@@ -3584,7 +3607,7 @@
           <a:p>
             <a:fld id="{5BCAD085-E8A6-8845-BD4E-CB4CCA059FC4}" type="datetimeFigureOut">
               <a:rPr lang="en-US" smtClean="0"/>
-              <a:t>5/17/26</a:t>
+              <a:t>5/18/26</a:t>
             </a:fld>
             <a:endParaRPr lang="en-US"/>
           </a:p>
@@ -3836,7 +3859,7 @@
           <a:p>
             <a:fld id="{5BCAD085-E8A6-8845-BD4E-CB4CCA059FC4}" type="datetimeFigureOut">
               <a:rPr lang="en-US" smtClean="0"/>
-              <a:t>5/17/26</a:t>
+              <a:t>5/18/26</a:t>
             </a:fld>
             <a:endParaRPr lang="en-US"/>
           </a:p>
@@ -4047,7 +4070,7 @@
           <a:p>
             <a:fld id="{5BCAD085-E8A6-8845-BD4E-CB4CCA059FC4}" type="datetimeFigureOut">
               <a:rPr lang="en-US" smtClean="0"/>
-              <a:t>5/17/26</a:t>
+              <a:t>5/18/26</a:t>
             </a:fld>
             <a:endParaRPr lang="en-US"/>
           </a:p>
@@ -4480,7 +4503,7 @@
             </a:pPr>
             <a:r>
               <a:rPr dirty="0"/>
-              <a:t>Haoyang Hu</a:t>
+              <a:t>Deep Learning in Genomics — Spring 2026</a:t>
             </a:r>
           </a:p>
           <a:p>
@@ -4500,7 +4523,7 @@
             </a:pPr>
             <a:r>
               <a:rPr dirty="0"/>
-              <a:t>Deep Learning in Genomics May 19, 2026</a:t>
+              <a:t>May 19, 2026</a:t>
             </a:r>
           </a:p>
         </p:txBody>
@@ -4685,7 +4708,7 @@
         <p:spPr>
           <a:xfrm>
             <a:off x="5212080" y="1188720"/>
-            <a:ext cx="6766560" cy="3840480"/>
+            <a:ext cx="6766560" cy="2565126"/>
           </a:xfrm>
           <a:prstGeom prst="rect">
             <a:avLst/>
@@ -4713,6 +4736,7 @@
               </a:defRPr>
             </a:pPr>
             <a:r>
+              <a:rPr dirty="0"/>
               <a:t>•   In silico mutagenesis on top 1,000 chr10 predictions</a:t>
             </a:r>
           </a:p>
@@ -4732,7 +4756,19 @@
               </a:defRPr>
             </a:pPr>
             <a:r>
-              <a:t>•   Saliency profiles clustered into 10 groups; PWMs matched against JASPAR</a:t>
+              <a:rPr dirty="0"/>
+              <a:t>•   Saliency profiles clustered into 10 groups; PWMs</a:t>
+            </a:r>
+            <a:br>
+              <a:rPr lang="en-US" dirty="0"/>
+            </a:br>
+            <a:r>
+              <a:rPr lang="en-US" dirty="0"/>
+              <a:t>     </a:t>
+            </a:r>
+            <a:r>
+              <a:rPr dirty="0"/>
+              <a:t>matched against JASPAR</a:t>
             </a:r>
           </a:p>
           <a:p>
@@ -4751,6 +4787,7 @@
               </a:defRPr>
             </a:pPr>
             <a:r>
+              <a:rPr dirty="0"/>
               <a:t>•   Initial matches: GATA1 (0.74), Sp1 (0.57), MYB (0.67)</a:t>
             </a:r>
           </a:p>
@@ -4770,6 +4807,7 @@
               </a:defRPr>
             </a:pPr>
             <a:r>
+              <a:rPr dirty="0"/>
               <a:t>•   But cluster PWMs are ~10x weaker than real motifs</a:t>
             </a:r>
           </a:p>
@@ -4899,7 +4937,7 @@
         <p:spPr>
           <a:xfrm>
             <a:off x="411480" y="1005840"/>
-            <a:ext cx="5715000" cy="365760"/>
+            <a:ext cx="5715000" cy="413959"/>
           </a:xfrm>
           <a:prstGeom prst="rect">
             <a:avLst/>
@@ -4927,6 +4965,7 @@
               </a:defRPr>
             </a:pPr>
             <a:r>
+              <a:rPr sz="2000" dirty="0"/>
               <a:t>What this experiment shows</a:t>
             </a:r>
           </a:p>
@@ -4941,7 +4980,7 @@
         <p:spPr>
           <a:xfrm>
             <a:off x="411480" y="1371600"/>
-            <a:ext cx="5715000" cy="1920240"/>
+            <a:ext cx="5715000" cy="1948034"/>
           </a:xfrm>
           <a:prstGeom prst="rect">
             <a:avLst/>
@@ -4969,7 +5008,19 @@
               </a:defRPr>
             </a:pPr>
             <a:r>
-              <a:t>•   Pretrained beats from-scratch on every metric: AUPRC 0.269 vs 0.168, AUROC 0.923 vs 0.879</a:t>
+              <a:rPr sz="1600" dirty="0"/>
+              <a:t>•   Pretrained beats from-scratch on every metric: AUPRC 0.269 vs</a:t>
+            </a:r>
+            <a:br>
+              <a:rPr lang="en-US" sz="1600" dirty="0"/>
+            </a:br>
+            <a:r>
+              <a:rPr lang="en-US" sz="1600" dirty="0"/>
+              <a:t>     </a:t>
+            </a:r>
+            <a:r>
+              <a:rPr sz="1600" dirty="0"/>
+              <a:t>0.168, AUROC 0.923 vs 0.879</a:t>
             </a:r>
           </a:p>
           <a:p>
@@ -4988,7 +5039,19 @@
               </a:defRPr>
             </a:pPr>
             <a:r>
-              <a:t>•   The improvement holds across thresholds, enhancer subtypes, and matching rules</a:t>
+              <a:rPr sz="1600" dirty="0"/>
+              <a:t>•   The improvement holds across thresholds, enhancer subtypes,</a:t>
+            </a:r>
+            <a:br>
+              <a:rPr lang="en-US" sz="1600" dirty="0"/>
+            </a:br>
+            <a:r>
+              <a:rPr lang="en-US" sz="1600" dirty="0"/>
+              <a:t>     </a:t>
+            </a:r>
+            <a:r>
+              <a:rPr sz="1600" dirty="0"/>
+              <a:t>and matching rules</a:t>
             </a:r>
           </a:p>
           <a:p>
@@ -5007,7 +5070,31 @@
               </a:defRPr>
             </a:pPr>
             <a:r>
-              <a:t>•   Pretraining gain is slightly larger on dELS (+0.08) than pELS (+0.06)</a:t>
+              <a:rPr sz="1600" dirty="0"/>
+              <a:t>•   Pretraining gain is slightly larger on </a:t>
+            </a:r>
+            <a:r>
+              <a:rPr sz="1600" dirty="0" err="1"/>
+              <a:t>dELS</a:t>
+            </a:r>
+            <a:r>
+              <a:rPr sz="1600" dirty="0"/>
+              <a:t> (+0.08) than </a:t>
+            </a:r>
+            <a:r>
+              <a:rPr sz="1600" dirty="0" err="1"/>
+              <a:t>pELS</a:t>
+            </a:r>
+            <a:br>
+              <a:rPr lang="en-US" sz="1600" dirty="0"/>
+            </a:br>
+            <a:r>
+              <a:rPr lang="en-US" sz="1600" dirty="0"/>
+              <a:t>      </a:t>
+            </a:r>
+            <a:r>
+              <a:rPr sz="1600" dirty="0"/>
+              <a:t>(+0.06)</a:t>
             </a:r>
           </a:p>
         </p:txBody>
@@ -5021,7 +5108,7 @@
         <p:spPr>
           <a:xfrm>
             <a:off x="411480" y="3520440"/>
-            <a:ext cx="5715000" cy="365760"/>
+            <a:ext cx="5715000" cy="413959"/>
           </a:xfrm>
           <a:prstGeom prst="rect">
             <a:avLst/>
@@ -5049,6 +5136,7 @@
               </a:defRPr>
             </a:pPr>
             <a:r>
+              <a:rPr sz="2000" dirty="0"/>
               <a:t>The more interesting finding</a:t>
             </a:r>
           </a:p>
@@ -5063,7 +5151,7 @@
         <p:spPr>
           <a:xfrm>
             <a:off x="411480" y="3886200"/>
-            <a:ext cx="5715000" cy="2194560"/>
+            <a:ext cx="5715000" cy="1948034"/>
           </a:xfrm>
           <a:prstGeom prst="rect">
             <a:avLst/>
@@ -5091,7 +5179,7 @@
               </a:defRPr>
             </a:pPr>
             <a:r>
-              <a:rPr dirty="0"/>
+              <a:rPr sz="1600" dirty="0"/>
               <a:t>•   Both models learn compositional features (GC content, CpG context), not specific TF binding motifs</a:t>
             </a:r>
           </a:p>
@@ -5111,7 +5199,7 @@
               </a:defRPr>
             </a:pPr>
             <a:r>
-              <a:rPr dirty="0"/>
+              <a:rPr sz="1600" dirty="0"/>
               <a:t>•   Confirmed via in silico mutagenesis and a peak-realignment test</a:t>
             </a:r>
           </a:p>
@@ -5131,6 +5219,7 @@
               </a:defRPr>
             </a:pPr>
             <a:r>
+              <a:rPr sz="1600" dirty="0"/>
               <a:t>•   Informative about what Puffin-D-style CNNs capture: they recognize regulatory regions but not the specific TF rules within them</a:t>
             </a:r>
           </a:p>
@@ -5145,7 +5234,7 @@
         <p:spPr>
           <a:xfrm>
             <a:off x="6263640" y="1005840"/>
-            <a:ext cx="5532120" cy="365760"/>
+            <a:ext cx="5532120" cy="413959"/>
           </a:xfrm>
           <a:prstGeom prst="rect">
             <a:avLst/>
@@ -5173,6 +5262,7 @@
               </a:defRPr>
             </a:pPr>
             <a:r>
+              <a:rPr sz="2000" dirty="0"/>
               <a:t>What this experiment does NOT show</a:t>
             </a:r>
           </a:p>
@@ -5187,7 +5277,7 @@
         <p:spPr>
           <a:xfrm>
             <a:off x="6263640" y="1371600"/>
-            <a:ext cx="5532120" cy="2743200"/>
+            <a:ext cx="5532120" cy="2885726"/>
           </a:xfrm>
           <a:prstGeom prst="rect">
             <a:avLst/>
@@ -5215,7 +5305,37 @@
               </a:defRPr>
             </a:pPr>
             <a:r>
-              <a:t>•   That the model is practically useful: precision at threshold 0.5 is only 18%, far below what discovery applications would require</a:t>
+              <a:rPr sz="1600" dirty="0"/>
+              <a:t>•   That the model is practically useful: precision at threshold 0.5</a:t>
+            </a:r>
+            <a:br>
+              <a:rPr lang="en-US" sz="1600" dirty="0"/>
+            </a:br>
+            <a:r>
+              <a:rPr lang="en-US" sz="1600" dirty="0"/>
+              <a:t>      </a:t>
+            </a:r>
+            <a:r>
+              <a:rPr sz="1600" dirty="0"/>
+              <a:t>is only 18%</a:t>
+            </a:r>
+            <a:br>
+              <a:rPr lang="en-US" sz="1600" dirty="0"/>
+            </a:br>
+            <a:r>
+              <a:rPr sz="1600" dirty="0"/>
+              <a:t>•   That Puffin-D is the right architecture: no comparison against</a:t>
+            </a:r>
+            <a:br>
+              <a:rPr lang="en-US" sz="1600" dirty="0"/>
+            </a:br>
+            <a:r>
+              <a:rPr lang="en-US" sz="1600" dirty="0"/>
+              <a:t>      </a:t>
+            </a:r>
+            <a:r>
+              <a:rPr sz="1600" dirty="0"/>
+              <a:t>simpler baselines (logistic regression, smaller CNNs)</a:t>
             </a:r>
           </a:p>
           <a:p>
@@ -5234,7 +5354,19 @@
               </a:defRPr>
             </a:pPr>
             <a:r>
-              <a:t>•   That Puffin-D is the right architecture: no comparison against simpler baselines (logistic regression, smaller CNNs)</a:t>
+              <a:rPr sz="1600" dirty="0"/>
+              <a:t>•   That the pretraining gain is statistically meaningful: only one</a:t>
+            </a:r>
+            <a:br>
+              <a:rPr lang="en-US" sz="1600" dirty="0"/>
+            </a:br>
+            <a:r>
+              <a:rPr lang="en-US" sz="1600" dirty="0"/>
+              <a:t>      </a:t>
+            </a:r>
+            <a:r>
+              <a:rPr sz="1600" dirty="0"/>
+              <a:t>run per condition, no variance estimate across seeds</a:t>
             </a:r>
           </a:p>
           <a:p>
@@ -5253,26 +5385,46 @@
               </a:defRPr>
             </a:pPr>
             <a:r>
-              <a:t>•   That the pretraining gain is statistically meaningful: only one run per condition, no variance estimate across seeds</a:t>
-            </a:r>
-          </a:p>
-          <a:p>
-            <a:pPr>
-              <a:lnSpc>
-                <a:spcPct val="120000"/>
-              </a:lnSpc>
-              <a:spcBef>
-                <a:spcPts val="400"/>
-              </a:spcBef>
-              <a:spcAft>
-                <a:spcPts val="0"/>
-              </a:spcAft>
-              <a:defRPr sz="1300" b="0" i="0">
-                <a:latin typeface="Calibri"/>
-              </a:defRPr>
-            </a:pPr>
-            <a:r>
-              <a:t>•   That the dELS-vs-pELS gap difference reflects regulatory biology rather than a general property of pretrained models on harder tasks</a:t>
+              <a:rPr sz="1600" dirty="0"/>
+              <a:t>•   That the </a:t>
+            </a:r>
+            <a:r>
+              <a:rPr sz="1600" dirty="0" err="1"/>
+              <a:t>dELS</a:t>
+            </a:r>
+            <a:r>
+              <a:rPr sz="1600" dirty="0"/>
+              <a:t>-vs-</a:t>
+            </a:r>
+            <a:r>
+              <a:rPr sz="1600" dirty="0" err="1"/>
+              <a:t>pELS</a:t>
+            </a:r>
+            <a:r>
+              <a:rPr sz="1600" dirty="0"/>
+              <a:t> gap difference reflects regulatory</a:t>
+            </a:r>
+            <a:br>
+              <a:rPr lang="en-US" sz="1600" dirty="0"/>
+            </a:br>
+            <a:r>
+              <a:rPr lang="en-US" sz="1600" dirty="0"/>
+              <a:t>      </a:t>
+            </a:r>
+            <a:r>
+              <a:rPr sz="1600" dirty="0"/>
+              <a:t>biology rather than a general property of pretrained models</a:t>
+            </a:r>
+            <a:br>
+              <a:rPr lang="en-US" sz="1600" dirty="0"/>
+            </a:br>
+            <a:r>
+              <a:rPr lang="en-US" sz="1600" dirty="0"/>
+              <a:t>      </a:t>
+            </a:r>
+            <a:r>
+              <a:rPr sz="1600" dirty="0"/>
+              <a:t>on harder tasks</a:t>
             </a:r>
           </a:p>
         </p:txBody>
@@ -5285,8 +5437,8 @@
         </p:nvSpPr>
         <p:spPr>
           <a:xfrm>
-            <a:off x="6263640" y="4297680"/>
-            <a:ext cx="5532120" cy="365760"/>
+            <a:off x="6199632" y="4257326"/>
+            <a:ext cx="5532120" cy="413959"/>
           </a:xfrm>
           <a:prstGeom prst="rect">
             <a:avLst/>
@@ -5314,6 +5466,7 @@
               </a:defRPr>
             </a:pPr>
             <a:r>
+              <a:rPr sz="2000" dirty="0"/>
               <a:t>Limitations &amp; future directions</a:t>
             </a:r>
           </a:p>
@@ -5327,8 +5480,8 @@
         </p:nvSpPr>
         <p:spPr>
           <a:xfrm>
-            <a:off x="6263640" y="4663440"/>
-            <a:ext cx="5532120" cy="1691640"/>
+            <a:off x="6248400" y="4643495"/>
+            <a:ext cx="5532120" cy="1357103"/>
           </a:xfrm>
           <a:prstGeom prst="rect">
             <a:avLst/>
@@ -5356,6 +5509,7 @@
               </a:defRPr>
             </a:pPr>
             <a:r>
+              <a:rPr sz="1600" dirty="0"/>
               <a:t>•   Single training run per condition limits statistical claims</a:t>
             </a:r>
           </a:p>
@@ -5375,6 +5529,7 @@
               </a:defRPr>
             </a:pPr>
             <a:r>
+              <a:rPr sz="1600" dirty="0"/>
               <a:t>•   No baseline architecture comparison</a:t>
             </a:r>
           </a:p>
@@ -5394,26 +5549,27 @@
               </a:defRPr>
             </a:pPr>
             <a:r>
-              <a:t>•   Small validation set (50 windows) caused noisy val-based selection</a:t>
-            </a:r>
-          </a:p>
-          <a:p>
-            <a:pPr>
-              <a:lnSpc>
-                <a:spcPct val="120000"/>
-              </a:lnSpc>
-              <a:spcBef>
-                <a:spcPts val="400"/>
-              </a:spcBef>
-              <a:spcAft>
-                <a:spcPts val="0"/>
-              </a:spcAft>
-              <a:defRPr sz="1300" b="0" i="0">
-                <a:latin typeface="Calibri"/>
-              </a:defRPr>
-            </a:pPr>
-            <a:r>
-              <a:t>•   Wider ISM windows and motif-aware objectives could push the model toward TF-specific representations</a:t>
+              <a:rPr sz="1600" dirty="0"/>
+              <a:t>•   Small validation set (50 windows) caused noisy </a:t>
+            </a:r>
+            <a:r>
+              <a:rPr sz="1600" dirty="0" err="1"/>
+              <a:t>val</a:t>
+            </a:r>
+            <a:r>
+              <a:rPr sz="1600" dirty="0"/>
+              <a:t>-based</a:t>
+            </a:r>
+            <a:br>
+              <a:rPr lang="en-US" sz="1600" dirty="0"/>
+            </a:br>
+            <a:r>
+              <a:rPr lang="en-US" sz="1600" dirty="0"/>
+              <a:t>     </a:t>
+            </a:r>
+            <a:r>
+              <a:rPr sz="1600" dirty="0"/>
+              <a:t>selection</a:t>
             </a:r>
           </a:p>
         </p:txBody>
@@ -5808,8 +5964,8 @@
         </p:nvSpPr>
         <p:spPr>
           <a:xfrm>
-            <a:off x="457200" y="4983480"/>
-            <a:ext cx="11247120" cy="411480"/>
+            <a:off x="457200" y="4775630"/>
+            <a:ext cx="11247120" cy="446148"/>
           </a:xfrm>
           <a:prstGeom prst="rect">
             <a:avLst/>
@@ -5837,7 +5993,16 @@
               </a:defRPr>
             </a:pPr>
             <a:r>
-              <a:t>How we test it</a:t>
+              <a:rPr dirty="0"/>
+              <a:t>How </a:t>
+            </a:r>
+            <a:r>
+              <a:rPr lang="en-US" dirty="0"/>
+              <a:t>I</a:t>
+            </a:r>
+            <a:r>
+              <a:rPr dirty="0"/>
+              <a:t> test it</a:t>
             </a:r>
           </a:p>
         </p:txBody>
@@ -5850,7 +6015,7 @@
         </p:nvSpPr>
         <p:spPr>
           <a:xfrm>
-            <a:off x="457200" y="5394960"/>
+            <a:off x="457200" y="5221778"/>
             <a:ext cx="11247120" cy="1463040"/>
           </a:xfrm>
           <a:prstGeom prst="rect">
@@ -5879,6 +6044,7 @@
               </a:defRPr>
             </a:pPr>
             <a:r>
+              <a:rPr dirty="0"/>
               <a:t>•   Train two versions of Puffin-D on identical data and hyperparameters</a:t>
             </a:r>
           </a:p>
@@ -5898,6 +6064,7 @@
               </a:defRPr>
             </a:pPr>
             <a:r>
+              <a:rPr dirty="0"/>
               <a:t>•   From-scratch (random weights) tests the architecture's general capability</a:t>
             </a:r>
           </a:p>
@@ -5917,6 +6084,7 @@
               </a:defRPr>
             </a:pPr>
             <a:r>
+              <a:rPr dirty="0"/>
               <a:t>•   Pretrained (Puffin-D weights) tests whether learned weights transfer</a:t>
             </a:r>
           </a:p>
@@ -5997,8 +6165,8 @@
         </p:nvSpPr>
         <p:spPr>
           <a:xfrm>
-            <a:off x="580912" y="1328569"/>
-            <a:ext cx="10209007" cy="3296928"/>
+            <a:off x="548640" y="1188720"/>
+            <a:ext cx="9692640" cy="5120640"/>
           </a:xfrm>
           <a:prstGeom prst="rect">
             <a:avLst/>
@@ -6026,16 +6194,7 @@
               </a:defRPr>
             </a:pPr>
             <a:r>
-              <a:rPr dirty="0"/>
-              <a:t>•   Genome reference: hg38 (one-hot encoded from </a:t>
-            </a:r>
-            <a:r>
-              <a:rPr dirty="0" err="1"/>
-              <a:t>packbits</a:t>
-            </a:r>
-            <a:r>
-              <a:rPr dirty="0"/>
-              <a:t> format)</a:t>
+              <a:t>•   Genome reference: hg38 (one-hot encoded from packbits format)</a:t>
             </a:r>
           </a:p>
           <a:p>
@@ -6054,24 +6213,7 @@
               </a:defRPr>
             </a:pPr>
             <a:r>
-              <a:rPr dirty="0"/>
-              <a:t>•   Enhancer labels: ENCODE SCREEN v3 </a:t>
-            </a:r>
-            <a:r>
-              <a:rPr dirty="0" err="1"/>
-              <a:t>cCRE</a:t>
-            </a:r>
-            <a:r>
-              <a:rPr dirty="0"/>
-              <a:t> annotations (GRCh38-cCREs.bed) intersected with K562 H3K27ac </a:t>
-            </a:r>
-            <a:r>
-              <a:rPr dirty="0" err="1"/>
-              <a:t>ChIP</a:t>
-            </a:r>
-            <a:r>
-              <a:rPr dirty="0"/>
-              <a:t>-seq peaks (ENCFF066IUT)</a:t>
+              <a:t>•   Enhancer labels: ENCODE SCREEN v3 cCRE annotations (GRCh38-cCREs.bed) intersected with K562 H3K27ac ChIP-seq peaks (ENCFF066IUT)</a:t>
             </a:r>
           </a:p>
           <a:p>
@@ -6090,24 +6232,7 @@
               </a:defRPr>
             </a:pPr>
             <a:r>
-              <a:rPr dirty="0"/>
-              <a:t>•   Enhancer subtypes: </a:t>
-            </a:r>
-            <a:r>
-              <a:rPr dirty="0" err="1"/>
-              <a:t>pELS</a:t>
-            </a:r>
-            <a:r>
-              <a:rPr dirty="0"/>
-              <a:t> (proximal, within 2 kb of TSS) and </a:t>
-            </a:r>
-            <a:r>
-              <a:rPr dirty="0" err="1"/>
-              <a:t>dELS</a:t>
-            </a:r>
-            <a:r>
-              <a:rPr dirty="0"/>
-              <a:t> (distal)</a:t>
+              <a:t>•   Enhancer subtypes: pELS (proximal, within 2 kb of TSS) and dELS (distal)</a:t>
             </a:r>
           </a:p>
           <a:p>
@@ -6126,7 +6251,6 @@
               </a:defRPr>
             </a:pPr>
             <a:r>
-              <a:rPr dirty="0"/>
               <a:t>•   Input: 100,000 bp DNA window. Output: per-base enhancer probability</a:t>
             </a:r>
           </a:p>
@@ -6146,7 +6270,6 @@
               </a:defRPr>
             </a:pPr>
             <a:r>
-              <a:rPr dirty="0"/>
               <a:t>•   Chromosome splits: chr1–7 + chr11–20 for training, chr21 for validation, chr10 held out for test</a:t>
             </a:r>
           </a:p>
@@ -6166,7 +6289,6 @@
               </a:defRPr>
             </a:pPr>
             <a:r>
-              <a:rPr dirty="0"/>
               <a:t>•   Whole-chromosome splits prevent local DNA homology from leaking between train and test</a:t>
             </a:r>
           </a:p>
@@ -6186,12 +6308,35 @@
               </a:defRPr>
             </a:pPr>
             <a:r>
-              <a:rPr dirty="0"/>
               <a:t>•   Positive rate on chr10: 1.30%. AUPRC chance baseline = 0.013</a:t>
             </a:r>
           </a:p>
         </p:txBody>
       </p:sp>
+      <p:pic>
+        <p:nvPicPr>
+          <p:cNvPr id="4" name="Picture 3" descr="ENCODE_color_white-01.png"/>
+          <p:cNvPicPr>
+            <a:picLocks noChangeAspect="1"/>
+          </p:cNvPicPr>
+          <p:nvPr/>
+        </p:nvPicPr>
+        <p:blipFill>
+          <a:blip r:embed="rId3"/>
+          <a:stretch>
+            <a:fillRect/>
+          </a:stretch>
+        </p:blipFill>
+        <p:spPr>
+          <a:xfrm>
+            <a:off x="8982348" y="5001492"/>
+            <a:ext cx="2996292" cy="1767812"/>
+          </a:xfrm>
+          <a:prstGeom prst="rect">
+            <a:avLst/>
+          </a:prstGeom>
+        </p:spPr>
+      </p:pic>
     </p:spTree>
   </p:cSld>
   <p:clrMapOvr>
@@ -6988,48 +7133,6 @@
         <p:spPr>
           <a:xfrm>
             <a:off x="457200" y="2743200"/>
-            <a:ext cx="11274552" cy="640080"/>
-          </a:xfrm>
-          <a:prstGeom prst="rect">
-            <a:avLst/>
-          </a:prstGeom>
-          <a:noFill/>
-        </p:spPr>
-        <p:txBody>
-          <a:bodyPr wrap="square">
-            <a:spAutoFit/>
-          </a:bodyPr>
-          <a:lstStyle/>
-          <a:p>
-            <a:pPr algn="ctr">
-              <a:lnSpc>
-                <a:spcPct val="120000"/>
-              </a:lnSpc>
-              <a:spcBef>
-                <a:spcPts val="0"/>
-              </a:spcBef>
-              <a:spcAft>
-                <a:spcPts val="0"/>
-              </a:spcAft>
-              <a:defRPr sz="1600" b="0" i="0">
-                <a:latin typeface="Calibri"/>
-              </a:defRPr>
-            </a:pPr>
-            <a:r>
-              <a:t>Input: 100,000 bp DNA (one-hot encoded). Output: per-base predictions. Internally: dilated convolutions in a double U-Net structure for both local motif and long-range context.</a:t>
-            </a:r>
-          </a:p>
-        </p:txBody>
-      </p:sp>
-      <p:sp>
-        <p:nvSpPr>
-          <p:cNvPr id="13" name="TextBox 12"/>
-          <p:cNvSpPr txBox="1"/>
-          <p:nvPr/>
-        </p:nvSpPr>
-        <p:spPr>
-          <a:xfrm>
-            <a:off x="457200" y="3520440"/>
             <a:ext cx="5669280" cy="457200"/>
           </a:xfrm>
           <a:prstGeom prst="rect">
@@ -7065,14 +7168,14 @@
       </p:sp>
       <p:sp>
         <p:nvSpPr>
-          <p:cNvPr id="14" name="TextBox 13"/>
+          <p:cNvPr id="13" name="TextBox 12"/>
           <p:cNvSpPr txBox="1"/>
           <p:nvPr/>
         </p:nvSpPr>
         <p:spPr>
           <a:xfrm>
-            <a:off x="457200" y="4023360"/>
-            <a:ext cx="5669280" cy="2743200"/>
+            <a:off x="457200" y="3246120"/>
+            <a:ext cx="5669280" cy="1634102"/>
           </a:xfrm>
           <a:prstGeom prst="rect">
             <a:avLst/>
@@ -7087,7 +7190,7 @@
           <a:p>
             <a:pPr>
               <a:lnSpc>
-                <a:spcPct val="125000"/>
+                <a:spcPct val="150000"/>
               </a:lnSpc>
               <a:spcBef>
                 <a:spcPts val="0"/>
@@ -7100,13 +7203,14 @@
               </a:defRPr>
             </a:pPr>
             <a:r>
+              <a:rPr dirty="0"/>
               <a:t>•   Predicting transcription start sites and core promoter elements</a:t>
             </a:r>
           </a:p>
           <a:p>
             <a:pPr>
               <a:lnSpc>
-                <a:spcPct val="125000"/>
+                <a:spcPct val="150000"/>
               </a:lnSpc>
               <a:spcBef>
                 <a:spcPts val="400"/>
@@ -7119,13 +7223,14 @@
               </a:defRPr>
             </a:pPr>
             <a:r>
+              <a:rPr dirty="0"/>
               <a:t>•   Trained on CAGE-seq and ENCODE annotation data</a:t>
             </a:r>
           </a:p>
           <a:p>
             <a:pPr>
               <a:lnSpc>
-                <a:spcPct val="125000"/>
+                <a:spcPct val="150000"/>
               </a:lnSpc>
               <a:spcBef>
                 <a:spcPts val="400"/>
@@ -7138,20 +7243,29 @@
               </a:defRPr>
             </a:pPr>
             <a:r>
-              <a:t>•   Designed to capture both local motifs (TATA, Inr) and broader compositional patterns (CpG islands, GC content)</a:t>
-            </a:r>
-          </a:p>
-        </p:txBody>
-      </p:sp>
-      <p:sp>
-        <p:nvSpPr>
-          <p:cNvPr id="15" name="TextBox 14"/>
+              <a:rPr dirty="0"/>
+              <a:t>•   Designed to capture both local motifs (TATA, </a:t>
+            </a:r>
+            <a:r>
+              <a:rPr dirty="0" err="1"/>
+              <a:t>Inr</a:t>
+            </a:r>
+            <a:r>
+              <a:rPr dirty="0"/>
+              <a:t>) and broader compositional patterns (CpG islands, GC content)</a:t>
+            </a:r>
+          </a:p>
+        </p:txBody>
+      </p:sp>
+      <p:sp>
+        <p:nvSpPr>
+          <p:cNvPr id="14" name="TextBox 13"/>
           <p:cNvSpPr txBox="1"/>
           <p:nvPr/>
         </p:nvSpPr>
         <p:spPr>
           <a:xfrm>
-            <a:off x="6400800" y="3520440"/>
+            <a:off x="6400800" y="2743200"/>
             <a:ext cx="5486400" cy="457200"/>
           </a:xfrm>
           <a:prstGeom prst="rect">
@@ -7180,21 +7294,21 @@
               </a:defRPr>
             </a:pPr>
             <a:r>
-              <a:t>Why test it on enhancers</a:t>
-            </a:r>
-          </a:p>
-        </p:txBody>
-      </p:sp>
-      <p:sp>
-        <p:nvSpPr>
-          <p:cNvPr id="16" name="TextBox 15"/>
+              <a:t>Model structure</a:t>
+            </a:r>
+          </a:p>
+        </p:txBody>
+      </p:sp>
+      <p:sp>
+        <p:nvSpPr>
+          <p:cNvPr id="15" name="TextBox 14"/>
           <p:cNvSpPr txBox="1"/>
           <p:nvPr/>
         </p:nvSpPr>
         <p:spPr>
           <a:xfrm>
-            <a:off x="6400800" y="4023360"/>
-            <a:ext cx="5486400" cy="2743200"/>
+            <a:off x="6400800" y="3246120"/>
+            <a:ext cx="5791200" cy="3096040"/>
           </a:xfrm>
           <a:prstGeom prst="rect">
             <a:avLst/>
@@ -7222,7 +7336,19 @@
               </a:defRPr>
             </a:pPr>
             <a:r>
-              <a:t>•   Enhancers and promoters share underlying biology: transcription factors binding motifs in compositional context</a:t>
+              <a:rPr dirty="0"/>
+              <a:t>•   Input: 100,000 bp DNA window, one-hot encoded (4 channels: A,</a:t>
+            </a:r>
+            <a:br>
+              <a:rPr lang="en-US" dirty="0"/>
+            </a:br>
+            <a:r>
+              <a:rPr lang="en-US" dirty="0"/>
+              <a:t>     </a:t>
+            </a:r>
+            <a:r>
+              <a:rPr dirty="0"/>
+              <a:t>C, G, T)</a:t>
             </a:r>
           </a:p>
           <a:p>
@@ -7241,8 +7367,10 @@
               </a:defRPr>
             </a:pPr>
             <a:r>
-              <a:t>•   But they differ: enhancers are distal, cell-type-specific, more variable in composition</a:t>
-            </a:r>
+              <a:rPr dirty="0"/>
+              <a:t>•   Dilated convolutions: receptive field grows exponentially without</a:t>
+            </a:r>
+            <a:endParaRPr lang="en-US" dirty="0"/>
           </a:p>
           <a:p>
             <a:pPr>
@@ -7260,7 +7388,94 @@
               </a:defRPr>
             </a:pPr>
             <a:r>
-              <a:t>•   Tests whether Puffin-D learned general regulatory sequence representations or promoter-specific rules</a:t>
+              <a:rPr lang="en-US" dirty="0"/>
+              <a:t>      </a:t>
+            </a:r>
+            <a:r>
+              <a:rPr dirty="0"/>
+              <a:t>losing per-base resolution</a:t>
+            </a:r>
+          </a:p>
+          <a:p>
+            <a:pPr>
+              <a:lnSpc>
+                <a:spcPct val="125000"/>
+              </a:lnSpc>
+              <a:spcBef>
+                <a:spcPts val="400"/>
+              </a:spcBef>
+              <a:spcAft>
+                <a:spcPts val="0"/>
+              </a:spcAft>
+              <a:defRPr sz="1600" b="0" i="0">
+                <a:latin typeface="Calibri"/>
+              </a:defRPr>
+            </a:pPr>
+            <a:r>
+              <a:rPr dirty="0"/>
+              <a:t>•   Double U-Net: two stacked encode/decode paths for richer long</a:t>
+            </a:r>
+            <a:br>
+              <a:rPr lang="en-US" dirty="0"/>
+            </a:br>
+            <a:r>
+              <a:rPr lang="en-US" dirty="0"/>
+              <a:t>     </a:t>
+            </a:r>
+            <a:r>
+              <a:rPr dirty="0"/>
+              <a:t>range integration</a:t>
+            </a:r>
+          </a:p>
+          <a:p>
+            <a:pPr>
+              <a:lnSpc>
+                <a:spcPct val="125000"/>
+              </a:lnSpc>
+              <a:spcBef>
+                <a:spcPts val="400"/>
+              </a:spcBef>
+              <a:spcAft>
+                <a:spcPts val="0"/>
+              </a:spcAft>
+              <a:defRPr sz="1600" b="0" i="0">
+                <a:latin typeface="Calibri"/>
+              </a:defRPr>
+            </a:pPr>
+            <a:r>
+              <a:rPr dirty="0"/>
+              <a:t>•   Skip connections preserve fine-scale detail through the</a:t>
+            </a:r>
+            <a:br>
+              <a:rPr lang="en-US" dirty="0"/>
+            </a:br>
+            <a:r>
+              <a:rPr lang="en-US" dirty="0"/>
+              <a:t>     </a:t>
+            </a:r>
+            <a:r>
+              <a:rPr dirty="0"/>
+              <a:t>bottleneck</a:t>
+            </a:r>
+          </a:p>
+          <a:p>
+            <a:pPr>
+              <a:lnSpc>
+                <a:spcPct val="125000"/>
+              </a:lnSpc>
+              <a:spcBef>
+                <a:spcPts val="400"/>
+              </a:spcBef>
+              <a:spcAft>
+                <a:spcPts val="0"/>
+              </a:spcAft>
+              <a:defRPr sz="1600" b="0" i="0">
+                <a:latin typeface="Calibri"/>
+              </a:defRPr>
+            </a:pPr>
+            <a:r>
+              <a:rPr dirty="0"/>
+              <a:t>•   Output: per-base predictions, one probability per input position</a:t>
             </a:r>
           </a:p>
         </p:txBody>
@@ -8060,7 +8275,7 @@
         </p:nvSpPr>
         <p:spPr>
           <a:xfrm>
-            <a:off x="10652760" y="2423160"/>
+            <a:off x="10500360" y="2439162"/>
             <a:ext cx="182880" cy="164592"/>
           </a:xfrm>
           <a:prstGeom prst="upArrow">
@@ -8100,90 +8315,6 @@
       </p:sp>
       <p:sp>
         <p:nvSpPr>
-          <p:cNvPr id="13" name="TextBox 12"/>
-          <p:cNvSpPr txBox="1"/>
-          <p:nvPr/>
-        </p:nvSpPr>
-        <p:spPr>
-          <a:xfrm>
-            <a:off x="9052559" y="2606040"/>
-            <a:ext cx="3383280" cy="292608"/>
-          </a:xfrm>
-          <a:prstGeom prst="rect">
-            <a:avLst/>
-          </a:prstGeom>
-          <a:noFill/>
-        </p:spPr>
-        <p:txBody>
-          <a:bodyPr wrap="square">
-            <a:spAutoFit/>
-          </a:bodyPr>
-          <a:lstStyle/>
-          <a:p>
-            <a:pPr algn="ctr">
-              <a:lnSpc>
-                <a:spcPct val="110000"/>
-              </a:lnSpc>
-              <a:spcBef>
-                <a:spcPts val="0"/>
-              </a:spcBef>
-              <a:spcAft>
-                <a:spcPts val="0"/>
-              </a:spcAft>
-              <a:defRPr sz="1200" b="0" i="1">
-                <a:latin typeface="Calibri"/>
-              </a:defRPr>
-            </a:pPr>
-            <a:r>
-              <a:t>Replaced for enhancer task</a:t>
-            </a:r>
-          </a:p>
-        </p:txBody>
-      </p:sp>
-      <p:sp>
-        <p:nvSpPr>
-          <p:cNvPr id="14" name="TextBox 13"/>
-          <p:cNvSpPr txBox="1"/>
-          <p:nvPr/>
-        </p:nvSpPr>
-        <p:spPr>
-          <a:xfrm>
-            <a:off x="457200" y="2743200"/>
-            <a:ext cx="11274552" cy="640080"/>
-          </a:xfrm>
-          <a:prstGeom prst="rect">
-            <a:avLst/>
-          </a:prstGeom>
-          <a:noFill/>
-        </p:spPr>
-        <p:txBody>
-          <a:bodyPr wrap="square">
-            <a:spAutoFit/>
-          </a:bodyPr>
-          <a:lstStyle/>
-          <a:p>
-            <a:pPr algn="ctr">
-              <a:lnSpc>
-                <a:spcPct val="120000"/>
-              </a:lnSpc>
-              <a:spcBef>
-                <a:spcPts val="0"/>
-              </a:spcBef>
-              <a:spcAft>
-                <a:spcPts val="0"/>
-              </a:spcAft>
-              <a:defRPr sz="1600" b="0" i="0">
-                <a:latin typeface="Calibri"/>
-              </a:defRPr>
-            </a:pPr>
-            <a:r>
-              <a:t>The Puffin-D backbone is kept unchanged. Only the output head is replaced with a binary classification layer producing per-base K562 enhancer probabilities.</a:t>
-            </a:r>
-          </a:p>
-        </p:txBody>
-      </p:sp>
-      <p:sp>
-        <p:nvSpPr>
           <p:cNvPr id="15" name="TextBox 14"/>
           <p:cNvSpPr txBox="1"/>
           <p:nvPr/>
@@ -8498,6 +8629,86 @@
             </a:pPr>
             <a:r>
               <a:t>•   Pretrained converged ~5x faster than from-scratch</a:t>
+            </a:r>
+          </a:p>
+        </p:txBody>
+      </p:sp>
+      <p:sp>
+        <p:nvSpPr>
+          <p:cNvPr id="19" name="Rounded Rectangle 18">
+            <a:extLst>
+              <a:ext uri="{FF2B5EF4-FFF2-40B4-BE49-F238E27FC236}">
+                <a16:creationId xmlns:a16="http://schemas.microsoft.com/office/drawing/2014/main" id="{CA9796AD-AED3-F5B6-F64A-B3D3934657C4}"/>
+              </a:ext>
+            </a:extLst>
+          </p:cNvPr>
+          <p:cNvSpPr/>
+          <p:nvPr/>
+        </p:nvSpPr>
+        <p:spPr>
+          <a:xfrm>
+            <a:off x="8808720" y="2670983"/>
+            <a:ext cx="3383280" cy="724662"/>
+          </a:xfrm>
+          <a:prstGeom prst="roundRect">
+            <a:avLst>
+              <a:gd name="adj" fmla="val 50000"/>
+            </a:avLst>
+          </a:prstGeom>
+        </p:spPr>
+        <p:style>
+          <a:lnRef idx="1">
+            <a:schemeClr val="accent5"/>
+          </a:lnRef>
+          <a:fillRef idx="2">
+            <a:schemeClr val="accent5"/>
+          </a:fillRef>
+          <a:effectRef idx="1">
+            <a:schemeClr val="accent5"/>
+          </a:effectRef>
+          <a:fontRef idx="minor">
+            <a:schemeClr val="dk1"/>
+          </a:fontRef>
+        </p:style>
+        <p:txBody>
+          <a:bodyPr rtlCol="0" anchor="ctr"/>
+          <a:lstStyle/>
+          <a:p>
+            <a:pPr marL="0" marR="0" lvl="0" indent="0" algn="ctr" defTabSz="457200" rtl="0" eaLnBrk="1" fontAlgn="auto" latinLnBrk="0" hangingPunct="1">
+              <a:lnSpc>
+                <a:spcPct val="120000"/>
+              </a:lnSpc>
+              <a:spcBef>
+                <a:spcPts val="0"/>
+              </a:spcBef>
+              <a:spcAft>
+                <a:spcPts val="0"/>
+              </a:spcAft>
+              <a:buClrTx/>
+              <a:buSzTx/>
+              <a:buFontTx/>
+              <a:buNone/>
+              <a:tabLst/>
+              <a:defRPr sz="1600" b="0" i="0">
+                <a:latin typeface="Calibri"/>
+              </a:defRPr>
+            </a:pPr>
+            <a:r>
+              <a:rPr kumimoji="0" lang="en-US" sz="1400" b="0" i="0" u="none" strike="noStrike" kern="1200" cap="none" spc="0" normalizeH="0" baseline="0" noProof="0" dirty="0">
+                <a:ln>
+                  <a:noFill/>
+                </a:ln>
+                <a:solidFill>
+                  <a:prstClr val="black"/>
+                </a:solidFill>
+                <a:effectLst/>
+                <a:uLnTx/>
+                <a:uFillTx/>
+                <a:latin typeface="Calibri"/>
+                <a:ea typeface="+mn-ea"/>
+                <a:cs typeface="+mn-cs"/>
+              </a:rPr>
+              <a:t>Output head is replaced with a binary classification layer producing per-base enhancer probabilities.</a:t>
             </a:r>
           </a:p>
         </p:txBody>
@@ -8578,7 +8789,7 @@
         <p:spPr>
           <a:xfrm>
             <a:off x="548640" y="1188720"/>
-            <a:ext cx="11155680" cy="4572000"/>
+            <a:ext cx="11155680" cy="3271152"/>
           </a:xfrm>
           <a:prstGeom prst="rect">
             <a:avLst/>
@@ -8606,7 +8817,19 @@
               </a:defRPr>
             </a:pPr>
             <a:r>
-              <a:t>•   Per-base AUROC: ranks enhancer bases vs non-enhancer bases. Weakness: easy to inflate on imbalanced data</a:t>
+              <a:rPr dirty="0"/>
+              <a:t>•   Per-base AUROC: ranks enhancer bases vs non-enhancer bases. Weakness: easy to inflate on</a:t>
+            </a:r>
+            <a:br>
+              <a:rPr lang="en-US" dirty="0"/>
+            </a:br>
+            <a:r>
+              <a:rPr lang="en-US" dirty="0"/>
+              <a:t>     </a:t>
+            </a:r>
+            <a:r>
+              <a:rPr dirty="0"/>
+              <a:t>imbalanced data</a:t>
             </a:r>
           </a:p>
           <a:p>
@@ -8625,6 +8848,7 @@
               </a:defRPr>
             </a:pPr>
             <a:r>
+              <a:rPr dirty="0"/>
               <a:t>•   Per-base AUPRC: tracks precision-recall tradeoff. More honest given 1.3% positive rate</a:t>
             </a:r>
           </a:p>
@@ -8644,6 +8868,7 @@
               </a:defRPr>
             </a:pPr>
             <a:r>
+              <a:rPr dirty="0"/>
               <a:t>•   Threshold sweep: precision and recall at thresholds 0.1, 0.3, 0.5, 0.7, 0.9</a:t>
             </a:r>
           </a:p>
@@ -8663,7 +8888,24 @@
               </a:defRPr>
             </a:pPr>
             <a:r>
-              <a:t>•   Stratified AUROC: separately for pELS and dELS positions</a:t>
+              <a:rPr dirty="0"/>
+              <a:t>•   Stratified AUROC: separately for </a:t>
+            </a:r>
+            <a:r>
+              <a:rPr dirty="0" err="1"/>
+              <a:t>pELS</a:t>
+            </a:r>
+            <a:r>
+              <a:rPr dirty="0"/>
+              <a:t> and </a:t>
+            </a:r>
+            <a:r>
+              <a:rPr dirty="0" err="1"/>
+              <a:t>dELS</a:t>
+            </a:r>
+            <a:r>
+              <a:rPr dirty="0"/>
+              <a:t> positions</a:t>
             </a:r>
           </a:p>
           <a:p>
@@ -8682,49 +8924,19 @@
               </a:defRPr>
             </a:pPr>
             <a:r>
-              <a:t>•   Peak-level recall: how many real enhancer regions did the model find. Two matching rules (any overlap and reciprocal-50)</a:t>
-            </a:r>
-          </a:p>
-        </p:txBody>
-      </p:sp>
-      <p:sp>
-        <p:nvSpPr>
-          <p:cNvPr id="4" name="TextBox 3"/>
-          <p:cNvSpPr txBox="1"/>
-          <p:nvPr/>
-        </p:nvSpPr>
-        <p:spPr>
-          <a:xfrm>
-            <a:off x="548640" y="5897880"/>
-            <a:ext cx="11155680" cy="640080"/>
-          </a:xfrm>
-          <a:prstGeom prst="rect">
-            <a:avLst/>
-          </a:prstGeom>
-          <a:noFill/>
-        </p:spPr>
-        <p:txBody>
-          <a:bodyPr wrap="square">
-            <a:spAutoFit/>
-          </a:bodyPr>
-          <a:lstStyle/>
-          <a:p>
-            <a:pPr>
-              <a:lnSpc>
-                <a:spcPct val="120000"/>
-              </a:lnSpc>
-              <a:spcBef>
-                <a:spcPts val="0"/>
-              </a:spcBef>
-              <a:spcAft>
-                <a:spcPts val="0"/>
-              </a:spcAft>
-              <a:defRPr sz="1600" b="0" i="0">
-                <a:latin typeface="Calibri"/>
-              </a:defRPr>
-            </a:pPr>
-            <a:r>
-              <a:t>Reporting multiple metrics confirms whether the result holds across operating points or only at one specific threshold.</a:t>
+              <a:rPr dirty="0"/>
+              <a:t>•   Peak-level recall: how many real enhancer regions did the model find. Two matching rules (any overlap</a:t>
+            </a:r>
+            <a:br>
+              <a:rPr lang="en-US" dirty="0"/>
+            </a:br>
+            <a:r>
+              <a:rPr lang="en-US" dirty="0"/>
+              <a:t>     </a:t>
+            </a:r>
+            <a:r>
+              <a:rPr dirty="0"/>
+              <a:t>and reciprocal-50)</a:t>
             </a:r>
           </a:p>
         </p:txBody>
@@ -8812,8 +9024,8 @@
         </p:blipFill>
         <p:spPr>
           <a:xfrm>
-            <a:off x="274320" y="1143000"/>
-            <a:ext cx="7772400" cy="3042684"/>
+            <a:off x="3981580" y="1325880"/>
+            <a:ext cx="8008365" cy="3135058"/>
           </a:xfrm>
           <a:prstGeom prst="rect">
             <a:avLst/>
@@ -8828,7 +9040,7 @@
         </p:nvSpPr>
         <p:spPr>
           <a:xfrm>
-            <a:off x="8275320" y="1234440"/>
+            <a:off x="457200" y="1325880"/>
             <a:ext cx="3749039" cy="457200"/>
           </a:xfrm>
           <a:prstGeom prst="rect">
@@ -8857,6 +9069,7 @@
               </a:defRPr>
             </a:pPr>
             <a:r>
+              <a:rPr dirty="0"/>
               <a:t>Axes</a:t>
             </a:r>
           </a:p>
@@ -8870,7 +9083,7 @@
         </p:nvSpPr>
         <p:spPr>
           <a:xfrm>
-            <a:off x="8275320" y="1783080"/>
+            <a:off x="457199" y="1955102"/>
             <a:ext cx="3749039" cy="2743200"/>
           </a:xfrm>
           <a:prstGeom prst="rect">
@@ -8899,6 +9112,7 @@
               </a:defRPr>
             </a:pPr>
             <a:r>
+              <a:rPr dirty="0"/>
               <a:t>•   Left: training loss vs epoch (lower = better)</a:t>
             </a:r>
           </a:p>
@@ -8918,6 +9132,7 @@
               </a:defRPr>
             </a:pPr>
             <a:r>
+              <a:rPr dirty="0"/>
               <a:t>•   Right: validation AUROC vs epoch (higher = better)</a:t>
             </a:r>
           </a:p>
@@ -8937,6 +9152,7 @@
               </a:defRPr>
             </a:pPr>
             <a:r>
+              <a:rPr dirty="0"/>
               <a:t>•   Pretrained converges ~5x faster than from-scratch</a:t>
             </a:r>
           </a:p>
@@ -8950,7 +9166,7 @@
         </p:nvSpPr>
         <p:spPr>
           <a:xfrm>
-            <a:off x="457200" y="4800600"/>
+            <a:off x="484632" y="5202382"/>
             <a:ext cx="11247120" cy="1371600"/>
           </a:xfrm>
           <a:prstGeom prst="rect">
@@ -9067,7 +9283,7 @@
         </p:nvGraphicFramePr>
         <p:xfrm>
           <a:off x="1828800" y="1005840"/>
-          <a:ext cx="8503920" cy="1828800"/>
+          <a:ext cx="8503920" cy="1859280"/>
         </p:xfrm>
         <a:graphic>
           <a:graphicData uri="http://schemas.openxmlformats.org/drawingml/2006/table">
@@ -9386,7 +9602,7 @@
         <p:spPr>
           <a:xfrm>
             <a:off x="457200" y="3017520"/>
-            <a:ext cx="11247120" cy="3657600"/>
+            <a:ext cx="11247120" cy="2968633"/>
           </a:xfrm>
           <a:prstGeom prst="rect">
             <a:avLst/>
@@ -9414,7 +9630,8 @@
               </a:defRPr>
             </a:pPr>
             <a:r>
-              <a:t>•   AUPRC chance baseline: 0.013 (equals the chr10 positive rate)</a:t>
+              <a:rPr dirty="0"/>
+              <a:t>•   AUPRC chance baseline: 0.013 (the chr10 positive rate)</a:t>
             </a:r>
           </a:p>
           <a:p>
@@ -9433,6 +9650,7 @@
               </a:defRPr>
             </a:pPr>
             <a:r>
+              <a:rPr dirty="0"/>
               <a:t>•   Pretrained reaches 21x above chance; from-scratch reaches 13x</a:t>
             </a:r>
           </a:p>
@@ -9452,6 +9670,7 @@
               </a:defRPr>
             </a:pPr>
             <a:r>
+              <a:rPr dirty="0"/>
               <a:t>•   Relative AUPRC improvement from pretraining: ~60%</a:t>
             </a:r>
           </a:p>
@@ -9471,6 +9690,7 @@
               </a:defRPr>
             </a:pPr>
             <a:r>
+              <a:rPr dirty="0"/>
               <a:t>•   AUROC gain (+0.044) translates to substantial discrimination improvement on this imbalanced task</a:t>
             </a:r>
           </a:p>
@@ -9490,7 +9710,19 @@
               </a:defRPr>
             </a:pPr>
             <a:r>
-              <a:t>•   Precision at threshold 0.5 means: when the model says "enhancer," it is right ~18% of the time (vs 1.3% by random guessing)</a:t>
+              <a:rPr dirty="0"/>
+              <a:t>•   Precision at threshold 0.5 means: when the model says "enhancer," it is right ~18% of the time (vs 1.3% by random</a:t>
+            </a:r>
+            <a:br>
+              <a:rPr lang="en-US" dirty="0"/>
+            </a:br>
+            <a:r>
+              <a:rPr lang="en-US" dirty="0"/>
+              <a:t>     </a:t>
+            </a:r>
+            <a:r>
+              <a:rPr dirty="0"/>
+              <a:t>guessing)</a:t>
             </a:r>
           </a:p>
           <a:p>
@@ -9509,6 +9741,7 @@
               </a:defRPr>
             </a:pPr>
             <a:r>
+              <a:rPr dirty="0"/>
               <a:t>•   Recall at threshold 0.5 means: the model finds ~56% of all enhancer bases at that threshold</a:t>
             </a:r>
           </a:p>
@@ -9637,8 +9870,8 @@
         </p:nvSpPr>
         <p:spPr>
           <a:xfrm>
-            <a:off x="502920" y="3566160"/>
-            <a:ext cx="3456432" cy="640080"/>
+            <a:off x="502919" y="3566160"/>
+            <a:ext cx="3598025" cy="520784"/>
           </a:xfrm>
           <a:prstGeom prst="rect">
             <a:avLst/>
@@ -9666,7 +9899,24 @@
               </a:defRPr>
             </a:pPr>
             <a:r>
-              <a:t>Axes: AUROC on y, enhancer subtype (pELS / dELS) on x.</a:t>
+              <a:rPr dirty="0"/>
+              <a:t>Axes: AUROC on y, enhancer subtype (</a:t>
+            </a:r>
+            <a:r>
+              <a:rPr dirty="0" err="1"/>
+              <a:t>pELS</a:t>
+            </a:r>
+            <a:r>
+              <a:rPr dirty="0"/>
+              <a:t> / </a:t>
+            </a:r>
+            <a:r>
+              <a:rPr dirty="0" err="1"/>
+              <a:t>dELS</a:t>
+            </a:r>
+            <a:r>
+              <a:rPr dirty="0"/>
+              <a:t>) on x.</a:t>
             </a:r>
           </a:p>
           <a:p>
@@ -9685,6 +9935,7 @@
               </a:defRPr>
             </a:pPr>
             <a:r>
+              <a:rPr dirty="0"/>
               <a:t>Higher bars = better discrimination on that subtype.</a:t>
             </a:r>
           </a:p>
@@ -9727,6 +9978,7 @@
               </a:defRPr>
             </a:pPr>
             <a:r>
+              <a:rPr dirty="0"/>
               <a:t>Axes: threshold on x, precision (left subplot) and recall (right subplot) on y.</a:t>
             </a:r>
           </a:p>
@@ -9746,6 +9998,7 @@
               </a:defRPr>
             </a:pPr>
             <a:r>
+              <a:rPr dirty="0"/>
               <a:t>Lines show how each metric changes as threshold sweeps from 0.1 to 0.9.</a:t>
             </a:r>
           </a:p>
@@ -9788,7 +10041,24 @@
               </a:defRPr>
             </a:pPr>
             <a:r>
-              <a:t>•   Pretrained wins on both pELS (proximal) and dELS (distal)</a:t>
+              <a:rPr dirty="0"/>
+              <a:t>•   Pretrained wins on both </a:t>
+            </a:r>
+            <a:r>
+              <a:rPr dirty="0" err="1"/>
+              <a:t>pELS</a:t>
+            </a:r>
+            <a:r>
+              <a:rPr dirty="0"/>
+              <a:t> (proximal) and </a:t>
+            </a:r>
+            <a:r>
+              <a:rPr dirty="0" err="1"/>
+              <a:t>dELS</a:t>
+            </a:r>
+            <a:r>
+              <a:rPr dirty="0"/>
+              <a:t> (distal)</a:t>
             </a:r>
           </a:p>
           <a:p>
@@ -9807,7 +10077,24 @@
               </a:defRPr>
             </a:pPr>
             <a:r>
-              <a:t>•   Improvement is larger on harder dELS (+0.08 vs +0.06 on pELS)</a:t>
+              <a:rPr dirty="0"/>
+              <a:t>•   Improvement is larger on harder </a:t>
+            </a:r>
+            <a:r>
+              <a:rPr dirty="0" err="1"/>
+              <a:t>dELS</a:t>
+            </a:r>
+            <a:r>
+              <a:rPr dirty="0"/>
+              <a:t> (+0.08 vs +0.06 on </a:t>
+            </a:r>
+            <a:r>
+              <a:rPr dirty="0" err="1"/>
+              <a:t>pELS</a:t>
+            </a:r>
+            <a:r>
+              <a:rPr dirty="0"/>
+              <a:t>)</a:t>
             </a:r>
           </a:p>
           <a:p>
@@ -9826,6 +10113,7 @@
               </a:defRPr>
             </a:pPr>
             <a:r>
+              <a:rPr dirty="0"/>
               <a:t>•   Pretrained leads on precision below threshold 0.9 and on recall above 0.3</a:t>
             </a:r>
           </a:p>

--- a/slides/K562_enhancer_prediction.pptx
+++ b/slides/K562_enhancer_prediction.pptx
@@ -8543,7 +8543,7 @@
         <p:spPr>
           <a:xfrm>
             <a:off x="6400800" y="4023360"/>
-            <a:ext cx="5486400" cy="2743200"/>
+            <a:ext cx="5486400" cy="2070118"/>
           </a:xfrm>
           <a:prstGeom prst="rect">
             <a:avLst/>
@@ -8571,7 +8571,24 @@
               </a:defRPr>
             </a:pPr>
             <a:r>
-              <a:t>•   pos_weight=25 calibrated to the 1:75 positive:negative ratio</a:t>
+              <a:rPr dirty="0"/>
+              <a:t>•   </a:t>
+            </a:r>
+            <a:r>
+              <a:rPr dirty="0" err="1"/>
+              <a:t>pos_weight</a:t>
+            </a:r>
+            <a:r>
+              <a:rPr dirty="0"/>
+              <a:t>=25 calibrated to the 1:75 </a:t>
+            </a:r>
+            <a:r>
+              <a:rPr dirty="0" err="1"/>
+              <a:t>positive:negative</a:t>
+            </a:r>
+            <a:r>
+              <a:rPr dirty="0"/>
+              <a:t> ratio</a:t>
             </a:r>
           </a:p>
           <a:p>
@@ -8590,7 +8607,27 @@
               </a:defRPr>
             </a:pPr>
             <a:r>
-              <a:t>•   lr 5e-4 with plateau decay, empirically stable across both models</a:t>
+              <a:rPr dirty="0"/>
+              <a:t>•   </a:t>
+            </a:r>
+            <a:r>
+              <a:rPr dirty="0" err="1"/>
+              <a:t>lr</a:t>
+            </a:r>
+            <a:r>
+              <a:rPr dirty="0"/>
+              <a:t> 5e-4 with plateau decay, empirically stable across both</a:t>
+            </a:r>
+            <a:br>
+              <a:rPr lang="en-US" dirty="0"/>
+            </a:br>
+            <a:r>
+              <a:rPr lang="en-US" dirty="0"/>
+              <a:t>     </a:t>
+            </a:r>
+            <a:r>
+              <a:rPr dirty="0"/>
+              <a:t>models</a:t>
             </a:r>
           </a:p>
           <a:p>
@@ -8609,7 +8646,19 @@
               </a:defRPr>
             </a:pPr>
             <a:r>
-              <a:t>•   Per-epoch window count fits one GPU hour, allows early stopping</a:t>
+              <a:rPr dirty="0"/>
+              <a:t>•   Per-epoch window count fits one GPU hour, allows early</a:t>
+            </a:r>
+            <a:br>
+              <a:rPr lang="en-US" dirty="0"/>
+            </a:br>
+            <a:r>
+              <a:rPr lang="en-US" dirty="0"/>
+              <a:t>     </a:t>
+            </a:r>
+            <a:r>
+              <a:rPr dirty="0"/>
+              <a:t>stopping</a:t>
             </a:r>
           </a:p>
           <a:p>
@@ -8628,6 +8677,7 @@
               </a:defRPr>
             </a:pPr>
             <a:r>
+              <a:rPr dirty="0"/>
               <a:t>•   Pretrained converged ~5x faster than from-scratch</a:t>
             </a:r>
           </a:p>

--- a/slides/K562_enhancer_prediction.pptx
+++ b/slides/K562_enhancer_prediction.pptx
@@ -15,7 +15,7 @@
     <p:sldId id="260" r:id="rId6"/>
     <p:sldId id="261" r:id="rId7"/>
     <p:sldId id="262" r:id="rId8"/>
-    <p:sldId id="263" r:id="rId9"/>
+    <p:sldId id="267" r:id="rId9"/>
     <p:sldId id="264" r:id="rId10"/>
     <p:sldId id="265" r:id="rId11"/>
     <p:sldId id="266" r:id="rId12"/>
@@ -941,54 +941,85 @@
           <a:lstStyle/>
           <a:p>
             <a:r>
+              <a:rPr dirty="0"/>
               <a:t>Building on the last slide, here's how I adapted Puffin-D for K562 enhancer prediction. The only architectural change is the output head, while everything in the backbone is unchanged from the original Puffin-D.</a:t>
             </a:r>
           </a:p>
           <a:p>
-            <a:endParaRPr/>
-          </a:p>
-          <a:p>
-            <a:r>
+            <a:endParaRPr dirty="0"/>
+          </a:p>
+          <a:p>
+            <a:r>
+              <a:rPr dirty="0"/>
               <a:t>Puffin-D's original output head predicted promoter-related quantities like TSS probability and core promoter element presence. I replaced it with a single sigmoid layer that outputs one probability per base, representing whether that base is part of a K562 enhancer. Everything else, including the backbone weights for the pretrained version, comes directly from Puffin-D.</a:t>
             </a:r>
           </a:p>
           <a:p>
-            <a:endParaRPr/>
-          </a:p>
-          <a:p>
-            <a:r>
-              <a:t>Training used binary cross-entropy loss with pos_weight=25 to address class imbalance. The pos_weight value of 25 was calibrated to roughly match the 1:75 positive-to-negative ratio in the training windows. It partially upweights positives without overcorrecting.</a:t>
-            </a:r>
-          </a:p>
-          <a:p>
-            <a:endParaRPr/>
-          </a:p>
-          <a:p>
-            <a:r>
-              <a:t>The optimizer is AdamW with weight decay 1e-4 and a base learning rate of 5e-4. The learning rate was selected after short pilot runs. I tried 1e-3, which was unstable, and 1e-4, which was too slow, before settling on 5e-4 with plateau-based decay, which halves the LR when validation loss stops improving. Batch size is 4. Mixed precision in bf16. Each epoch processes 2,500 windows sampled from the training chromosomes.</a:t>
-            </a:r>
-          </a:p>
-          <a:p>
-            <a:endParaRPr/>
-          </a:p>
-          <a:p>
-            <a:r>
+            <a:endParaRPr dirty="0"/>
+          </a:p>
+          <a:p>
+            <a:r>
+              <a:rPr dirty="0"/>
+              <a:t>Training used binary cross-entropy loss with </a:t>
+            </a:r>
+            <a:r>
+              <a:rPr dirty="0" err="1"/>
+              <a:t>pos_weight</a:t>
+            </a:r>
+            <a:r>
+              <a:rPr dirty="0"/>
+              <a:t>=25 to address class imbalance. The </a:t>
+            </a:r>
+            <a:r>
+              <a:rPr dirty="0" err="1"/>
+              <a:t>pos_weight</a:t>
+            </a:r>
+            <a:r>
+              <a:rPr dirty="0"/>
+              <a:t> value of 25 was calibrated to roughly match the 1:75 positive-to-negative ratio in the training windows. It partially upweights positives without overcorrecting.</a:t>
+            </a:r>
+          </a:p>
+          <a:p>
+            <a:endParaRPr dirty="0"/>
+          </a:p>
+          <a:p>
+            <a:r>
+              <a:rPr dirty="0"/>
+              <a:t>The optimizer is </a:t>
+            </a:r>
+            <a:r>
+              <a:rPr dirty="0" err="1"/>
+              <a:t>AdamW</a:t>
+            </a:r>
+            <a:r>
+              <a:rPr dirty="0"/>
+              <a:t> with weight decay 1e-4 and a base learning rate of 5e-4. The learning rate was selected after short pilot runs. I tried 1e-3, which was unstable, and 1e-4, which was too slow, before settling on 5e-4 with plateau-based decay, which halves the LR when validation loss stops improving. Batch size is 4. Mixed precision in bf16. Each epoch processes 2,500 windows sampled from the training chromosomes.</a:t>
+            </a:r>
+          </a:p>
+          <a:p>
+            <a:endParaRPr dirty="0"/>
+          </a:p>
+          <a:p>
+            <a:r>
+              <a:rPr dirty="0"/>
               <a:t>The two models differ only in starting weights. From-scratch starts from random initialization and needs 35 epochs to converge, which took about three and a half hours on a single Blackwell GPU on the lab cluster. Pretrained converges in 7 epochs and takes about 45 minutes on the same hardware. So pretraining gives roughly a 5x reduction in wall-clock training time on top of the performance improvement.</a:t>
             </a:r>
           </a:p>
           <a:p>
-            <a:endParaRPr/>
-          </a:p>
-          <a:p>
-            <a:r>
+            <a:endParaRPr dirty="0"/>
+          </a:p>
+          <a:p>
+            <a:r>
+              <a:rPr dirty="0"/>
               <a:t>Someone might ask whether I could push pretrained higher by training it longer. I let it run beyond convergence to confirm there was no further improvement. The gains plateau around epoch 7.</a:t>
             </a:r>
           </a:p>
           <a:p>
-            <a:endParaRPr/>
-          </a:p>
-          <a:p>
-            <a:r>
+            <a:endParaRPr dirty="0"/>
+          </a:p>
+          <a:p>
+            <a:r>
+              <a:rPr dirty="0"/>
               <a:t>One thing worth keeping in mind for the next few slides. Two of the metrics I'll show, AUROC and AUPRC, answer different questions and behave very differently on imbalanced data. AUROC asks how often the model ranks a random positive base above a random negative base. With 1.3% positive rate, the random negative is almost always an easy one. Most non-enhancer bases are in gene deserts or repetitive regions that look nothing like enhancers, so AUROC can look high even when the model isn't precise. AUPRC is the harsher metric. It tracks how much precision you maintain as you try to recall more positives, and it directly penalizes false positives. So when you see AUROC 0.92 and AUPRC 0.27 on the same model, those aren't contradictory. They're answering different questions, and the AUPRC number is the more honest one for our problem.</a:t>
             </a:r>
           </a:p>
@@ -1320,6 +1351,14 @@
           <a:p>
             <a:r>
               <a:t>What we can defend from this slide: pretrained substantially improves AUPRC over from-scratch on the same architecture and data. About a 60% relative improvement. What we cannot defend: that either model is a practically useful enhancer predictor.</a:t>
+            </a:r>
+          </a:p>
+          <a:p>
+            <a:endParaRPr/>
+          </a:p>
+          <a:p>
+            <a:r>
+              <a:t>One more number to note for context: the F1 score combines precision and recall into a single value. At threshold 0.5, pretrained's F1 is 0.276 versus from-scratch's 0.196. Looking across all five thresholds tested, pretrained's best F1 is 0.33, from-scratch's best is 0.25. So pretrained is better at every operating point, not just at threshold 0.5.</a:t>
             </a:r>
           </a:p>
         </p:txBody>
@@ -4454,7 +4493,7 @@
         <p:spPr>
           <a:xfrm>
             <a:off x="914400" y="1920240"/>
-            <a:ext cx="10360152" cy="2719078"/>
+            <a:ext cx="10360152" cy="1906548"/>
           </a:xfrm>
           <a:prstGeom prst="rect">
             <a:avLst/>
@@ -4483,7 +4522,7 @@
             </a:pPr>
             <a:r>
               <a:rPr dirty="0"/>
-              <a:t>K562 Enhancer Prediction from DNA Sequence</a:t>
+              <a:t>Enhancer Prediction from DNA Sequence</a:t>
             </a:r>
           </a:p>
           <a:p>
@@ -5582,7 +5621,7 @@
         </p:nvSpPr>
         <p:spPr>
           <a:xfrm>
-            <a:off x="457200" y="6446520"/>
+            <a:off x="489204" y="6251080"/>
             <a:ext cx="11274552" cy="365760"/>
           </a:xfrm>
           <a:prstGeom prst="rect">
@@ -5608,13 +5647,13 @@
               </a:spcAft>
             </a:pPr>
             <a:r>
-              <a:rPr sz="2000" b="0">
+              <a:rPr sz="2000" b="0" dirty="0">
                 <a:latin typeface="Calibri"/>
               </a:rPr>
               <a:t>Code and results: </a:t>
             </a:r>
             <a:r>
-              <a:rPr sz="2000" b="0">
+              <a:rPr sz="2000" b="0" dirty="0">
                 <a:solidFill>
                   <a:srgbClr val="0066CC"/>
                 </a:solidFill>
@@ -6166,7 +6205,7 @@
         <p:spPr>
           <a:xfrm>
             <a:off x="548640" y="1188720"/>
-            <a:ext cx="9692640" cy="5120640"/>
+            <a:ext cx="9692640" cy="4469622"/>
           </a:xfrm>
           <a:prstGeom prst="rect">
             <a:avLst/>
@@ -6194,8 +6233,10 @@
               </a:defRPr>
             </a:pPr>
             <a:r>
-              <a:t>•   Genome reference: hg38 (one-hot encoded from packbits format)</a:t>
-            </a:r>
+              <a:rPr sz="2400" dirty="0"/>
+              <a:t>•   Genome reference: hg38 </a:t>
+            </a:r>
+            <a:endParaRPr lang="en-US" sz="2400" dirty="0"/>
           </a:p>
           <a:p>
             <a:pPr>
@@ -6203,6 +6244,94 @@
                 <a:spcPct val="125000"/>
               </a:lnSpc>
               <a:spcBef>
+                <a:spcPts val="0"/>
+              </a:spcBef>
+              <a:spcAft>
+                <a:spcPts val="0"/>
+              </a:spcAft>
+              <a:defRPr sz="1900" b="0" i="0">
+                <a:latin typeface="Calibri"/>
+              </a:defRPr>
+            </a:pPr>
+            <a:r>
+              <a:rPr sz="2400" dirty="0"/>
+              <a:t>•   Enhancer labels: ENCODE SCREEN v3 </a:t>
+            </a:r>
+            <a:r>
+              <a:rPr sz="2400" dirty="0" err="1"/>
+              <a:t>cCRE</a:t>
+            </a:r>
+            <a:r>
+              <a:rPr sz="2400" dirty="0"/>
+              <a:t> annotations (GRCh38</a:t>
+            </a:r>
+            <a:br>
+              <a:rPr lang="en-US" sz="2400" dirty="0"/>
+            </a:br>
+            <a:r>
+              <a:rPr lang="en-US" sz="2400" dirty="0"/>
+              <a:t>     </a:t>
+            </a:r>
+            <a:r>
+              <a:rPr sz="2400" dirty="0" err="1"/>
+              <a:t>cCREs.bed</a:t>
+            </a:r>
+            <a:r>
+              <a:rPr sz="2400" dirty="0"/>
+              <a:t>) intersected with K562 H3K27ac </a:t>
+            </a:r>
+            <a:r>
+              <a:rPr sz="2400" dirty="0" err="1"/>
+              <a:t>ChIP</a:t>
+            </a:r>
+            <a:r>
+              <a:rPr sz="2400" dirty="0"/>
+              <a:t>-seq peaks </a:t>
+            </a:r>
+            <a:endParaRPr lang="en-US" sz="2400" dirty="0"/>
+          </a:p>
+          <a:p>
+            <a:pPr>
+              <a:lnSpc>
+                <a:spcPct val="125000"/>
+              </a:lnSpc>
+              <a:spcBef>
+                <a:spcPts val="0"/>
+              </a:spcBef>
+              <a:spcAft>
+                <a:spcPts val="0"/>
+              </a:spcAft>
+              <a:defRPr sz="1900" b="0" i="0">
+                <a:latin typeface="Calibri"/>
+              </a:defRPr>
+            </a:pPr>
+            <a:r>
+              <a:rPr sz="2400" dirty="0"/>
+              <a:t>•   Enhancer subtypes: </a:t>
+            </a:r>
+            <a:r>
+              <a:rPr sz="2400" dirty="0" err="1"/>
+              <a:t>pELS</a:t>
+            </a:r>
+            <a:r>
+              <a:rPr sz="2400" dirty="0"/>
+              <a:t> (proximal, within 2 kb of TSS) and </a:t>
+            </a:r>
+            <a:r>
+              <a:rPr sz="2400" dirty="0" err="1"/>
+              <a:t>dELS</a:t>
+            </a:r>
+            <a:r>
+              <a:rPr sz="2400" dirty="0"/>
+              <a:t> (distal)</a:t>
+            </a:r>
+          </a:p>
+          <a:p>
+            <a:pPr>
+              <a:lnSpc>
+                <a:spcPct val="125000"/>
+              </a:lnSpc>
+              <a:spcBef>
                 <a:spcPts val="400"/>
               </a:spcBef>
               <a:spcAft>
@@ -6213,7 +6342,8 @@
               </a:defRPr>
             </a:pPr>
             <a:r>
-              <a:t>•   Enhancer labels: ENCODE SCREEN v3 cCRE annotations (GRCh38-cCREs.bed) intersected with K562 H3K27ac ChIP-seq peaks (ENCFF066IUT)</a:t>
+              <a:rPr sz="2400" dirty="0"/>
+              <a:t>•   Input: 100,000 bp DNA window. Output: per-base enhancer probability</a:t>
             </a:r>
           </a:p>
           <a:p>
@@ -6232,7 +6362,19 @@
               </a:defRPr>
             </a:pPr>
             <a:r>
-              <a:t>•   Enhancer subtypes: pELS (proximal, within 2 kb of TSS) and dELS (distal)</a:t>
+              <a:rPr sz="2400" dirty="0"/>
+              <a:t>•   Chromosome splits: chr1–7 + chr11–20 for training, chr21 for validation,</a:t>
+            </a:r>
+            <a:br>
+              <a:rPr lang="en-US" sz="2400" dirty="0"/>
+            </a:br>
+            <a:r>
+              <a:rPr lang="en-US" sz="2400" dirty="0"/>
+              <a:t>     </a:t>
+            </a:r>
+            <a:r>
+              <a:rPr sz="2400" dirty="0"/>
+              <a:t>chr10 held out for test</a:t>
             </a:r>
           </a:p>
           <a:p>
@@ -6251,64 +6393,19 @@
               </a:defRPr>
             </a:pPr>
             <a:r>
-              <a:t>•   Input: 100,000 bp DNA window. Output: per-base enhancer probability</a:t>
-            </a:r>
-          </a:p>
-          <a:p>
-            <a:pPr>
-              <a:lnSpc>
-                <a:spcPct val="125000"/>
-              </a:lnSpc>
-              <a:spcBef>
-                <a:spcPts val="400"/>
-              </a:spcBef>
-              <a:spcAft>
-                <a:spcPts val="0"/>
-              </a:spcAft>
-              <a:defRPr sz="1900" b="0" i="0">
-                <a:latin typeface="Calibri"/>
-              </a:defRPr>
-            </a:pPr>
-            <a:r>
-              <a:t>•   Chromosome splits: chr1–7 + chr11–20 for training, chr21 for validation, chr10 held out for test</a:t>
-            </a:r>
-          </a:p>
-          <a:p>
-            <a:pPr>
-              <a:lnSpc>
-                <a:spcPct val="125000"/>
-              </a:lnSpc>
-              <a:spcBef>
-                <a:spcPts val="400"/>
-              </a:spcBef>
-              <a:spcAft>
-                <a:spcPts val="0"/>
-              </a:spcAft>
-              <a:defRPr sz="1900" b="0" i="0">
-                <a:latin typeface="Calibri"/>
-              </a:defRPr>
-            </a:pPr>
-            <a:r>
-              <a:t>•   Whole-chromosome splits prevent local DNA homology from leaking between train and test</a:t>
-            </a:r>
-          </a:p>
-          <a:p>
-            <a:pPr>
-              <a:lnSpc>
-                <a:spcPct val="125000"/>
-              </a:lnSpc>
-              <a:spcBef>
-                <a:spcPts val="400"/>
-              </a:spcBef>
-              <a:spcAft>
-                <a:spcPts val="0"/>
-              </a:spcAft>
-              <a:defRPr sz="1900" b="0" i="0">
-                <a:latin typeface="Calibri"/>
-              </a:defRPr>
-            </a:pPr>
-            <a:r>
-              <a:t>•   Positive rate on chr10: 1.30%. AUPRC chance baseline = 0.013</a:t>
+              <a:rPr sz="2400" dirty="0"/>
+              <a:t>•   Whole-chromosome splits prevent local DNA homology from leaking</a:t>
+            </a:r>
+            <a:br>
+              <a:rPr lang="en-US" sz="2400" dirty="0"/>
+            </a:br>
+            <a:r>
+              <a:rPr lang="en-US" sz="2400" dirty="0"/>
+              <a:t>      </a:t>
+            </a:r>
+            <a:r>
+              <a:rPr sz="2400" dirty="0"/>
+              <a:t>between train and test</a:t>
             </a:r>
           </a:p>
         </p:txBody>
@@ -8364,7 +8461,7 @@
         <p:spPr>
           <a:xfrm>
             <a:off x="457200" y="4023360"/>
-            <a:ext cx="5669280" cy="2743200"/>
+            <a:ext cx="5669280" cy="1916230"/>
           </a:xfrm>
           <a:prstGeom prst="rect">
             <a:avLst/>
@@ -8377,7 +8474,7 @@
           </a:bodyPr>
           <a:lstStyle/>
           <a:p>
-            <a:pPr>
+            <a:pPr marL="285750" indent="-285750">
               <a:lnSpc>
                 <a:spcPct val="125000"/>
               </a:lnSpc>
@@ -8387,108 +8484,129 @@
               <a:spcAft>
                 <a:spcPts val="0"/>
               </a:spcAft>
+              <a:buFont typeface="Arial" panose="020B0604020202020204" pitchFamily="34" charset="0"/>
+              <a:buChar char="•"/>
               <a:defRPr sz="1600" b="0" i="0">
                 <a:latin typeface="Calibri"/>
               </a:defRPr>
             </a:pPr>
             <a:r>
-              <a:t>•   Loss: BCE with pos_weight=25 (handles 1.3% positive rate)</a:t>
-            </a:r>
-          </a:p>
-          <a:p>
-            <a:pPr>
+              <a:rPr lang="en-US" sz="1600" dirty="0"/>
+              <a:t>Loss: BCE with </a:t>
+            </a:r>
+            <a:r>
+              <a:rPr lang="en-US" sz="1600" dirty="0" err="1"/>
+              <a:t>pos_weight</a:t>
+            </a:r>
+            <a:r>
+              <a:rPr lang="en-US" sz="1600" dirty="0"/>
+              <a:t>=25 (handles 1.3% positive rate) </a:t>
+            </a:r>
+          </a:p>
+          <a:p>
+            <a:pPr marL="285750" indent="-285750">
               <a:lnSpc>
                 <a:spcPct val="125000"/>
               </a:lnSpc>
               <a:spcBef>
-                <a:spcPts val="400"/>
-              </a:spcBef>
-              <a:spcAft>
-                <a:spcPts val="0"/>
-              </a:spcAft>
+                <a:spcPts val="0"/>
+              </a:spcBef>
+              <a:spcAft>
+                <a:spcPts val="0"/>
+              </a:spcAft>
+              <a:buFont typeface="Arial" panose="020B0604020202020204" pitchFamily="34" charset="0"/>
+              <a:buChar char="•"/>
               <a:defRPr sz="1600" b="0" i="0">
                 <a:latin typeface="Calibri"/>
               </a:defRPr>
             </a:pPr>
             <a:r>
-              <a:t>•   Optimizer: AdamW, lr 5e-4, weight decay 1e-4, plateau decay</a:t>
-            </a:r>
-          </a:p>
-          <a:p>
-            <a:pPr>
+              <a:rPr lang="en-US" sz="1600" dirty="0"/>
+              <a:t>Optimizer: </a:t>
+            </a:r>
+            <a:r>
+              <a:rPr lang="en-US" sz="1600" dirty="0" err="1"/>
+              <a:t>AdamW</a:t>
+            </a:r>
+            <a:r>
+              <a:rPr lang="en-US" sz="1600" dirty="0"/>
+              <a:t>, </a:t>
+            </a:r>
+            <a:r>
+              <a:rPr lang="en-US" sz="1600" dirty="0" err="1"/>
+              <a:t>lr</a:t>
+            </a:r>
+            <a:r>
+              <a:rPr lang="en-US" sz="1600" dirty="0"/>
+              <a:t> 2e-3, weight decay 1e-4, plateau decay </a:t>
+            </a:r>
+          </a:p>
+          <a:p>
+            <a:pPr marL="285750" indent="-285750">
               <a:lnSpc>
                 <a:spcPct val="125000"/>
               </a:lnSpc>
               <a:spcBef>
-                <a:spcPts val="400"/>
-              </a:spcBef>
-              <a:spcAft>
-                <a:spcPts val="0"/>
-              </a:spcAft>
+                <a:spcPts val="0"/>
+              </a:spcBef>
+              <a:spcAft>
+                <a:spcPts val="0"/>
+              </a:spcAft>
+              <a:buFont typeface="Arial" panose="020B0604020202020204" pitchFamily="34" charset="0"/>
+              <a:buChar char="•"/>
               <a:defRPr sz="1600" b="0" i="0">
                 <a:latin typeface="Calibri"/>
               </a:defRPr>
             </a:pPr>
             <a:r>
-              <a:t>•   Batch size: 4. Mixed precision (bf16)</a:t>
-            </a:r>
-          </a:p>
-          <a:p>
-            <a:pPr>
+              <a:rPr lang="en-US" sz="1600" dirty="0"/>
+              <a:t>2,500 windows sampled per epoch </a:t>
+            </a:r>
+          </a:p>
+          <a:p>
+            <a:pPr marL="285750" indent="-285750">
               <a:lnSpc>
                 <a:spcPct val="125000"/>
               </a:lnSpc>
               <a:spcBef>
-                <a:spcPts val="400"/>
-              </a:spcBef>
-              <a:spcAft>
-                <a:spcPts val="0"/>
-              </a:spcAft>
+                <a:spcPts val="0"/>
+              </a:spcBef>
+              <a:spcAft>
+                <a:spcPts val="0"/>
+              </a:spcAft>
+              <a:buFont typeface="Arial" panose="020B0604020202020204" pitchFamily="34" charset="0"/>
+              <a:buChar char="•"/>
               <a:defRPr sz="1600" b="0" i="0">
                 <a:latin typeface="Calibri"/>
               </a:defRPr>
             </a:pPr>
             <a:r>
-              <a:t>•   2,500 windows sampled per epoch</a:t>
-            </a:r>
-          </a:p>
-          <a:p>
-            <a:pPr>
+              <a:rPr lang="en-US" sz="1600" dirty="0"/>
+              <a:t>From-scratch: 35 epochs, ~3.5 hours on one Blackwell GPU</a:t>
+            </a:r>
+          </a:p>
+          <a:p>
+            <a:pPr marL="285750" indent="-285750">
               <a:lnSpc>
                 <a:spcPct val="125000"/>
               </a:lnSpc>
               <a:spcBef>
-                <a:spcPts val="400"/>
-              </a:spcBef>
-              <a:spcAft>
-                <a:spcPts val="0"/>
-              </a:spcAft>
+                <a:spcPts val="0"/>
+              </a:spcBef>
+              <a:spcAft>
+                <a:spcPts val="0"/>
+              </a:spcAft>
+              <a:buFont typeface="Arial" panose="020B0604020202020204" pitchFamily="34" charset="0"/>
+              <a:buChar char="•"/>
               <a:defRPr sz="1600" b="0" i="0">
                 <a:latin typeface="Calibri"/>
               </a:defRPr>
             </a:pPr>
             <a:r>
-              <a:t>•   From-scratch: 35 epochs, ~3.5 hours on one Blackwell GPU</a:t>
-            </a:r>
-          </a:p>
-          <a:p>
-            <a:pPr>
-              <a:lnSpc>
-                <a:spcPct val="125000"/>
-              </a:lnSpc>
-              <a:spcBef>
-                <a:spcPts val="400"/>
-              </a:spcBef>
-              <a:spcAft>
-                <a:spcPts val="0"/>
-              </a:spcAft>
-              <a:defRPr sz="1600" b="0" i="0">
-                <a:latin typeface="Calibri"/>
-              </a:defRPr>
-            </a:pPr>
-            <a:r>
-              <a:t>•   Pretrained: 7 epochs, ~45 minutes on one Blackwell GPU</a:t>
-            </a:r>
+              <a:rPr lang="en-US" sz="1600" dirty="0"/>
+              <a:t>Pretrained: capped at 20 epochs, converged by epoch 7, ~45 minutes</a:t>
+            </a:r>
+            <a:endParaRPr dirty="0"/>
           </a:p>
         </p:txBody>
       </p:sp>
@@ -8543,7 +8661,7 @@
         <p:spPr>
           <a:xfrm>
             <a:off x="6400800" y="4023360"/>
-            <a:ext cx="5486400" cy="2070118"/>
+            <a:ext cx="5486400" cy="2224007"/>
           </a:xfrm>
           <a:prstGeom prst="rect">
             <a:avLst/>
@@ -8556,7 +8674,7 @@
           </a:bodyPr>
           <a:lstStyle/>
           <a:p>
-            <a:pPr>
+            <a:pPr marL="285750" indent="-285750">
               <a:lnSpc>
                 <a:spcPct val="125000"/>
               </a:lnSpc>
@@ -8566,120 +8684,91 @@
               <a:spcAft>
                 <a:spcPts val="0"/>
               </a:spcAft>
+              <a:buFont typeface="Arial" panose="020B0604020202020204" pitchFamily="34" charset="0"/>
+              <a:buChar char="•"/>
               <a:defRPr sz="1600" b="0" i="0">
                 <a:latin typeface="Calibri"/>
               </a:defRPr>
             </a:pPr>
             <a:r>
-              <a:rPr dirty="0"/>
-              <a:t>•   </a:t>
-            </a:r>
-            <a:r>
-              <a:rPr dirty="0" err="1"/>
+              <a:rPr lang="en-US" sz="1600" dirty="0" err="1"/>
               <a:t>pos_weight</a:t>
             </a:r>
             <a:r>
-              <a:rPr dirty="0"/>
-              <a:t>=25 calibrated to the 1:75 </a:t>
-            </a:r>
-            <a:r>
-              <a:rPr dirty="0" err="1"/>
-              <a:t>positive:negative</a:t>
-            </a:r>
-            <a:r>
-              <a:rPr dirty="0"/>
-              <a:t> ratio</a:t>
-            </a:r>
-          </a:p>
-          <a:p>
-            <a:pPr>
+              <a:rPr lang="en-US" sz="1600" dirty="0"/>
+              <a:t>=25 partially compensates for the 1:75 imbalance.</a:t>
+            </a:r>
+          </a:p>
+          <a:p>
+            <a:pPr marL="285750" indent="-285750">
               <a:lnSpc>
                 <a:spcPct val="125000"/>
               </a:lnSpc>
               <a:spcBef>
-                <a:spcPts val="400"/>
-              </a:spcBef>
-              <a:spcAft>
-                <a:spcPts val="0"/>
-              </a:spcAft>
+                <a:spcPts val="0"/>
+              </a:spcBef>
+              <a:spcAft>
+                <a:spcPts val="0"/>
+              </a:spcAft>
+              <a:buFont typeface="Arial" panose="020B0604020202020204" pitchFamily="34" charset="0"/>
+              <a:buChar char="•"/>
               <a:defRPr sz="1600" b="0" i="0">
                 <a:latin typeface="Calibri"/>
               </a:defRPr>
             </a:pPr>
             <a:r>
-              <a:rPr dirty="0"/>
-              <a:t>•   </a:t>
-            </a:r>
-            <a:r>
-              <a:rPr dirty="0" err="1"/>
+              <a:rPr lang="en-US" dirty="0" err="1"/>
               <a:t>lr</a:t>
             </a:r>
             <a:r>
-              <a:rPr dirty="0"/>
-              <a:t> 5e-4 with plateau decay, empirically stable across both</a:t>
-            </a:r>
-            <a:br>
               <a:rPr lang="en-US" dirty="0"/>
-            </a:br>
+              <a:t> 2e-3 with plateau decay, reused from prior Puffin-D-backed work in the lab </a:t>
+            </a:r>
+          </a:p>
+          <a:p>
+            <a:pPr marL="285750" indent="-285750">
+              <a:lnSpc>
+                <a:spcPct val="125000"/>
+              </a:lnSpc>
+              <a:spcBef>
+                <a:spcPts val="0"/>
+              </a:spcBef>
+              <a:spcAft>
+                <a:spcPts val="0"/>
+              </a:spcAft>
+              <a:buFont typeface="Arial" panose="020B0604020202020204" pitchFamily="34" charset="0"/>
+              <a:buChar char="•"/>
+              <a:defRPr sz="1600" b="0" i="0">
+                <a:latin typeface="Calibri"/>
+              </a:defRPr>
+            </a:pPr>
             <a:r>
               <a:rPr lang="en-US" dirty="0"/>
-              <a:t>     </a:t>
-            </a:r>
-            <a:r>
-              <a:rPr dirty="0"/>
-              <a:t>models</a:t>
-            </a:r>
-          </a:p>
-          <a:p>
-            <a:pPr>
+              <a:t>2,500 windows per epoch fits a reasonable epoch length and gives enough samples for plateau detection </a:t>
+            </a:r>
+          </a:p>
+          <a:p>
+            <a:pPr marL="285750" indent="-285750">
               <a:lnSpc>
                 <a:spcPct val="125000"/>
               </a:lnSpc>
               <a:spcBef>
-                <a:spcPts val="400"/>
-              </a:spcBef>
-              <a:spcAft>
-                <a:spcPts val="0"/>
-              </a:spcAft>
+                <a:spcPts val="0"/>
+              </a:spcBef>
+              <a:spcAft>
+                <a:spcPts val="0"/>
+              </a:spcAft>
+              <a:buFont typeface="Arial" panose="020B0604020202020204" pitchFamily="34" charset="0"/>
+              <a:buChar char="•"/>
               <a:defRPr sz="1600" b="0" i="0">
                 <a:latin typeface="Calibri"/>
               </a:defRPr>
             </a:pPr>
             <a:r>
-              <a:rPr dirty="0"/>
-              <a:t>•   Per-epoch window count fits one GPU hour, allows early</a:t>
-            </a:r>
-            <a:br>
               <a:rPr lang="en-US" dirty="0"/>
-            </a:br>
-            <a:r>
-              <a:rPr lang="en-US" dirty="0"/>
-              <a:t>     </a:t>
-            </a:r>
-            <a:r>
-              <a:rPr dirty="0"/>
-              <a:t>stopping</a:t>
-            </a:r>
-          </a:p>
-          <a:p>
-            <a:pPr>
-              <a:lnSpc>
-                <a:spcPct val="125000"/>
-              </a:lnSpc>
-              <a:spcBef>
-                <a:spcPts val="400"/>
-              </a:spcBef>
-              <a:spcAft>
-                <a:spcPts val="0"/>
-              </a:spcAft>
-              <a:defRPr sz="1600" b="0" i="0">
-                <a:latin typeface="Calibri"/>
-              </a:defRPr>
-            </a:pPr>
-            <a:r>
-              <a:rPr dirty="0"/>
-              <a:t>•   Pretrained converged ~5x faster than from-scratch</a:t>
-            </a:r>
+              <a:t>Pretrained converged ~5x faster than from-scratch</a:t>
+            </a:r>
+            <a:endParaRPr dirty="0"/>
           </a:p>
         </p:txBody>
       </p:sp>
@@ -8839,7 +8928,7 @@
         <p:spPr>
           <a:xfrm>
             <a:off x="548640" y="1188720"/>
-            <a:ext cx="11155680" cy="3271152"/>
+            <a:ext cx="11155680" cy="3769430"/>
           </a:xfrm>
           <a:prstGeom prst="rect">
             <a:avLst/>
@@ -8852,40 +8941,56 @@
           </a:bodyPr>
           <a:lstStyle/>
           <a:p>
-            <a:pPr>
-              <a:lnSpc>
-                <a:spcPct val="130000"/>
-              </a:lnSpc>
-              <a:spcBef>
-                <a:spcPts val="0"/>
-              </a:spcBef>
-              <a:spcAft>
-                <a:spcPts val="0"/>
-              </a:spcAft>
+            <a:pPr marL="342900" indent="-342900">
+              <a:lnSpc>
+                <a:spcPct val="150000"/>
+              </a:lnSpc>
+              <a:spcBef>
+                <a:spcPts val="0"/>
+              </a:spcBef>
+              <a:spcAft>
+                <a:spcPts val="0"/>
+              </a:spcAft>
+              <a:buFont typeface="Arial" panose="020B0604020202020204" pitchFamily="34" charset="0"/>
+              <a:buChar char="•"/>
               <a:defRPr sz="2000" b="0" i="0">
                 <a:latin typeface="Calibri"/>
               </a:defRPr>
             </a:pPr>
             <a:r>
-              <a:rPr dirty="0"/>
-              <a:t>•   Per-base AUROC: ranks enhancer bases vs non-enhancer bases. Weakness: easy to inflate on</a:t>
-            </a:r>
-            <a:br>
-              <a:rPr lang="en-US" dirty="0"/>
-            </a:br>
-            <a:r>
-              <a:rPr lang="en-US" dirty="0"/>
-              <a:t>     </a:t>
-            </a:r>
-            <a:r>
-              <a:rPr dirty="0"/>
+              <a:rPr sz="2400" dirty="0"/>
+              <a:t>Per-base AUROC: ranks enhancer bases vs non-enhancer bases. </a:t>
+            </a:r>
+            <a:endParaRPr lang="en-US" sz="2400" dirty="0"/>
+          </a:p>
+          <a:p>
+            <a:pPr marL="800100" lvl="1" indent="-342900">
+              <a:lnSpc>
+                <a:spcPct val="150000"/>
+              </a:lnSpc>
+              <a:buFont typeface="Arial" panose="020B0604020202020204" pitchFamily="34" charset="0"/>
+              <a:buChar char="•"/>
+              <a:defRPr sz="2000" b="0" i="0">
+                <a:latin typeface="Calibri"/>
+              </a:defRPr>
+            </a:pPr>
+            <a:r>
+              <a:rPr sz="2400" dirty="0"/>
+              <a:t>Weakness: easy to inflate on</a:t>
+            </a:r>
+            <a:r>
+              <a:rPr lang="en-US" sz="2400" dirty="0"/>
+              <a:t> </a:t>
+            </a:r>
+            <a:r>
+              <a:rPr sz="2400" dirty="0"/>
               <a:t>imbalanced data</a:t>
             </a:r>
           </a:p>
           <a:p>
-            <a:pPr>
-              <a:lnSpc>
-                <a:spcPct val="130000"/>
+            <a:pPr marL="342900" indent="-342900">
+              <a:lnSpc>
+                <a:spcPct val="150000"/>
               </a:lnSpc>
               <a:spcBef>
                 <a:spcPts val="800"/>
@@ -8893,19 +8998,21 @@
               <a:spcAft>
                 <a:spcPts val="0"/>
               </a:spcAft>
+              <a:buFont typeface="Arial" panose="020B0604020202020204" pitchFamily="34" charset="0"/>
+              <a:buChar char="•"/>
               <a:defRPr sz="2000" b="0" i="0">
                 <a:latin typeface="Calibri"/>
               </a:defRPr>
             </a:pPr>
             <a:r>
-              <a:rPr dirty="0"/>
-              <a:t>•   Per-base AUPRC: tracks precision-recall tradeoff. More honest given 1.3% positive rate</a:t>
-            </a:r>
-          </a:p>
-          <a:p>
-            <a:pPr>
-              <a:lnSpc>
-                <a:spcPct val="130000"/>
+              <a:rPr sz="2400" dirty="0"/>
+              <a:t>Per-base AUPRC: tracks precision-recall tradeoff. More honest given 1.3% positive rate</a:t>
+            </a:r>
+          </a:p>
+          <a:p>
+            <a:pPr marL="342900" indent="-342900">
+              <a:lnSpc>
+                <a:spcPct val="150000"/>
               </a:lnSpc>
               <a:spcBef>
                 <a:spcPts val="800"/>
@@ -8913,19 +9020,21 @@
               <a:spcAft>
                 <a:spcPts val="0"/>
               </a:spcAft>
+              <a:buFont typeface="Arial" panose="020B0604020202020204" pitchFamily="34" charset="0"/>
+              <a:buChar char="•"/>
               <a:defRPr sz="2000" b="0" i="0">
                 <a:latin typeface="Calibri"/>
               </a:defRPr>
             </a:pPr>
             <a:r>
-              <a:rPr dirty="0"/>
-              <a:t>•   Threshold sweep: precision and recall at thresholds 0.1, 0.3, 0.5, 0.7, 0.9</a:t>
-            </a:r>
-          </a:p>
-          <a:p>
-            <a:pPr>
-              <a:lnSpc>
-                <a:spcPct val="130000"/>
+              <a:rPr sz="2400" dirty="0"/>
+              <a:t>Threshold sweep: precision and recall at thresholds 0.1, 0.3, 0.5, 0.7, 0.9</a:t>
+            </a:r>
+          </a:p>
+          <a:p>
+            <a:pPr marL="342900" indent="-342900">
+              <a:lnSpc>
+                <a:spcPct val="150000"/>
               </a:lnSpc>
               <a:spcBef>
                 <a:spcPts val="800"/>
@@ -8933,35 +9042,37 @@
               <a:spcAft>
                 <a:spcPts val="0"/>
               </a:spcAft>
+              <a:buFont typeface="Arial" panose="020B0604020202020204" pitchFamily="34" charset="0"/>
+              <a:buChar char="•"/>
               <a:defRPr sz="2000" b="0" i="0">
                 <a:latin typeface="Calibri"/>
               </a:defRPr>
             </a:pPr>
             <a:r>
-              <a:rPr dirty="0"/>
-              <a:t>•   Stratified AUROC: separately for </a:t>
-            </a:r>
-            <a:r>
-              <a:rPr dirty="0" err="1"/>
+              <a:rPr sz="2400" dirty="0"/>
+              <a:t>Stratified AUROC: separately for </a:t>
+            </a:r>
+            <a:r>
+              <a:rPr sz="2400" dirty="0" err="1"/>
               <a:t>pELS</a:t>
             </a:r>
             <a:r>
-              <a:rPr dirty="0"/>
+              <a:rPr sz="2400" dirty="0"/>
               <a:t> and </a:t>
             </a:r>
             <a:r>
-              <a:rPr dirty="0" err="1"/>
+              <a:rPr sz="2400" dirty="0" err="1"/>
               <a:t>dELS</a:t>
             </a:r>
             <a:r>
-              <a:rPr dirty="0"/>
+              <a:rPr sz="2400" dirty="0"/>
               <a:t> positions</a:t>
             </a:r>
           </a:p>
           <a:p>
-            <a:pPr>
-              <a:lnSpc>
-                <a:spcPct val="130000"/>
+            <a:pPr marL="342900" indent="-342900">
+              <a:lnSpc>
+                <a:spcPct val="150000"/>
               </a:lnSpc>
               <a:spcBef>
                 <a:spcPts val="800"/>
@@ -8969,24 +9080,15 @@
               <a:spcAft>
                 <a:spcPts val="0"/>
               </a:spcAft>
+              <a:buFont typeface="Arial" panose="020B0604020202020204" pitchFamily="34" charset="0"/>
+              <a:buChar char="•"/>
               <a:defRPr sz="2000" b="0" i="0">
                 <a:latin typeface="Calibri"/>
               </a:defRPr>
             </a:pPr>
             <a:r>
-              <a:rPr dirty="0"/>
-              <a:t>•   Peak-level recall: how many real enhancer regions did the model find. Two matching rules (any overlap</a:t>
-            </a:r>
-            <a:br>
-              <a:rPr lang="en-US" dirty="0"/>
-            </a:br>
-            <a:r>
-              <a:rPr lang="en-US" dirty="0"/>
-              <a:t>     </a:t>
-            </a:r>
-            <a:r>
-              <a:rPr dirty="0"/>
-              <a:t>and reciprocal-50)</a:t>
+              <a:rPr sz="2400" dirty="0"/>
+              <a:t>Peak-level recall: how many real enhancer regions did the model find. </a:t>
             </a:r>
           </a:p>
         </p:txBody>
@@ -9329,11 +9431,17 @@
           <p:cNvGraphicFramePr>
             <a:graphicFrameLocks noGrp="1"/>
           </p:cNvGraphicFramePr>
-          <p:nvPr/>
+          <p:nvPr>
+            <p:extLst>
+              <p:ext uri="{D42A27DB-BD31-4B8C-83A1-F6EECF244321}">
+                <p14:modId xmlns:p14="http://schemas.microsoft.com/office/powerpoint/2010/main" val="1174964326"/>
+              </p:ext>
+            </p:extLst>
+          </p:nvPr>
         </p:nvGraphicFramePr>
         <p:xfrm>
-          <a:off x="1828800" y="1005840"/>
-          <a:ext cx="8503920" cy="1859280"/>
+          <a:off x="1828800" y="914400"/>
+          <a:ext cx="8503920" cy="2590800"/>
         </p:xfrm>
         <a:graphic>
           <a:graphicData uri="http://schemas.openxmlformats.org/drawingml/2006/table">
@@ -9364,7 +9472,7 @@
                   </a:extLst>
                 </a:gridCol>
               </a:tblGrid>
-              <a:tr h="365760">
+              <a:tr h="384586">
                 <a:tc>
                   <a:txBody>
                     <a:bodyPr/>
@@ -9372,7 +9480,7 @@
                     <a:p>
                       <a:pPr algn="l"/>
                       <a:r>
-                        <a:rPr sz="2000" b="1">
+                        <a:rPr sz="2000" b="1" dirty="0">
                           <a:latin typeface="Calibri"/>
                         </a:rPr>
                         <a:t>Metric</a:t>
@@ -9419,7 +9527,7 @@
                   </a:ext>
                 </a:extLst>
               </a:tr>
-              <a:tr h="365760">
+              <a:tr h="355002">
                 <a:tc>
                   <a:txBody>
                     <a:bodyPr/>
@@ -9474,7 +9582,7 @@
                   </a:ext>
                 </a:extLst>
               </a:tr>
-              <a:tr h="365760">
+              <a:tr h="355002">
                 <a:tc>
                   <a:txBody>
                     <a:bodyPr/>
@@ -9529,7 +9637,7 @@
                   </a:ext>
                 </a:extLst>
               </a:tr>
-              <a:tr h="365760">
+              <a:tr h="355002">
                 <a:tc>
                   <a:txBody>
                     <a:bodyPr/>
@@ -9584,7 +9692,7 @@
                   </a:ext>
                 </a:extLst>
               </a:tr>
-              <a:tr h="365760">
+              <a:tr h="355002">
                 <a:tc>
                   <a:txBody>
                     <a:bodyPr/>
@@ -9639,6 +9747,116 @@
                   </a:ext>
                 </a:extLst>
               </a:tr>
+              <a:tr h="355002">
+                <a:tc>
+                  <a:txBody>
+                    <a:bodyPr/>
+                    <a:lstStyle/>
+                    <a:p>
+                      <a:pPr algn="l"/>
+                      <a:r>
+                        <a:rPr sz="1800" b="0">
+                          <a:latin typeface="Calibri"/>
+                        </a:rPr>
+                        <a:t>F1 @ threshold 0.5</a:t>
+                      </a:r>
+                    </a:p>
+                  </a:txBody>
+                  <a:tcPr/>
+                </a:tc>
+                <a:tc>
+                  <a:txBody>
+                    <a:bodyPr/>
+                    <a:lstStyle/>
+                    <a:p>
+                      <a:pPr algn="ctr"/>
+                      <a:r>
+                        <a:rPr sz="1800" b="0">
+                          <a:latin typeface="Calibri"/>
+                        </a:rPr>
+                        <a:t>0.196</a:t>
+                      </a:r>
+                    </a:p>
+                  </a:txBody>
+                  <a:tcPr/>
+                </a:tc>
+                <a:tc>
+                  <a:txBody>
+                    <a:bodyPr/>
+                    <a:lstStyle/>
+                    <a:p>
+                      <a:pPr algn="ctr"/>
+                      <a:r>
+                        <a:rPr sz="1800" b="0">
+                          <a:latin typeface="Calibri"/>
+                        </a:rPr>
+                        <a:t>0.276</a:t>
+                      </a:r>
+                    </a:p>
+                  </a:txBody>
+                  <a:tcPr/>
+                </a:tc>
+                <a:extLst>
+                  <a:ext uri="{0D108BD9-81ED-4DB2-BD59-A6C34878D82A}">
+                    <a16:rowId xmlns:a16="http://schemas.microsoft.com/office/drawing/2014/main" val="10005"/>
+                  </a:ext>
+                </a:extLst>
+              </a:tr>
+              <a:tr h="355002">
+                <a:tc>
+                  <a:txBody>
+                    <a:bodyPr/>
+                    <a:lstStyle/>
+                    <a:p>
+                      <a:pPr algn="l"/>
+                      <a:r>
+                        <a:rPr sz="1800" b="0">
+                          <a:latin typeface="Calibri"/>
+                        </a:rPr>
+                        <a:t>Best F1 across all thresholds</a:t>
+                      </a:r>
+                    </a:p>
+                  </a:txBody>
+                  <a:tcPr/>
+                </a:tc>
+                <a:tc>
+                  <a:txBody>
+                    <a:bodyPr/>
+                    <a:lstStyle/>
+                    <a:p>
+                      <a:pPr algn="ctr"/>
+                      <a:r>
+                        <a:rPr sz="1800" b="0">
+                          <a:latin typeface="Calibri"/>
+                        </a:rPr>
+                        <a:t>0.246</a:t>
+                      </a:r>
+                    </a:p>
+                  </a:txBody>
+                  <a:tcPr/>
+                </a:tc>
+                <a:tc>
+                  <a:txBody>
+                    <a:bodyPr/>
+                    <a:lstStyle/>
+                    <a:p>
+                      <a:pPr algn="ctr"/>
+                      <a:r>
+                        <a:rPr sz="1800" b="0" dirty="0">
+                          <a:latin typeface="Calibri"/>
+                        </a:rPr>
+                        <a:t>0.330</a:t>
+                      </a:r>
+                    </a:p>
+                  </a:txBody>
+                  <a:tcPr/>
+                </a:tc>
+                <a:extLst>
+                  <a:ext uri="{0D108BD9-81ED-4DB2-BD59-A6C34878D82A}">
+                    <a16:rowId xmlns:a16="http://schemas.microsoft.com/office/drawing/2014/main" val="10006"/>
+                  </a:ext>
+                </a:extLst>
+              </a:tr>
             </a:tbl>
           </a:graphicData>
         </a:graphic>
@@ -9651,8 +9869,8 @@
         </p:nvSpPr>
         <p:spPr>
           <a:xfrm>
-            <a:off x="457200" y="3017520"/>
-            <a:ext cx="11247120" cy="2968633"/>
+            <a:off x="457200" y="3674534"/>
+            <a:ext cx="11247120" cy="3001591"/>
           </a:xfrm>
           <a:prstGeom prst="rect">
             <a:avLst/>
@@ -9680,119 +9898,128 @@
               </a:defRPr>
             </a:pPr>
             <a:r>
+              <a:rPr lang="en-US" dirty="0"/>
+              <a:t>•   AUPRC chance baseline: 0.013 (the chr10 positive rate)</a:t>
+            </a:r>
+          </a:p>
+          <a:p>
+            <a:pPr>
+              <a:lnSpc>
+                <a:spcPct val="130000"/>
+              </a:lnSpc>
+              <a:spcBef>
+                <a:spcPts val="600"/>
+              </a:spcBef>
+              <a:spcAft>
+                <a:spcPts val="0"/>
+              </a:spcAft>
+              <a:defRPr sz="1800" b="0" i="0">
+                <a:latin typeface="Calibri"/>
+              </a:defRPr>
+            </a:pPr>
+            <a:r>
+              <a:rPr lang="en-US" dirty="0"/>
+              <a:t>•   Pretrained reaches 21x above chance; from-scratch reaches 13x</a:t>
+            </a:r>
+          </a:p>
+          <a:p>
+            <a:pPr>
+              <a:lnSpc>
+                <a:spcPct val="130000"/>
+              </a:lnSpc>
+              <a:spcBef>
+                <a:spcPts val="600"/>
+              </a:spcBef>
+              <a:spcAft>
+                <a:spcPts val="0"/>
+              </a:spcAft>
+              <a:defRPr sz="1800" b="0" i="0">
+                <a:latin typeface="Calibri"/>
+              </a:defRPr>
+            </a:pPr>
+            <a:r>
+              <a:rPr lang="en-US" dirty="0"/>
+              <a:t>•   Relative AUPRC improvement from pretraining: ~60%</a:t>
+            </a:r>
+          </a:p>
+          <a:p>
+            <a:pPr>
+              <a:lnSpc>
+                <a:spcPct val="130000"/>
+              </a:lnSpc>
+              <a:spcBef>
+                <a:spcPts val="600"/>
+              </a:spcBef>
+              <a:spcAft>
+                <a:spcPts val="0"/>
+              </a:spcAft>
+              <a:defRPr sz="1800" b="0" i="0">
+                <a:latin typeface="Calibri"/>
+              </a:defRPr>
+            </a:pPr>
+            <a:r>
+              <a:rPr lang="en-US" dirty="0"/>
+              <a:t>•   AUROC gain (+0.044) translates to substantial discrimination improvement on this imbalanced task</a:t>
+            </a:r>
+          </a:p>
+          <a:p>
+            <a:pPr>
+              <a:lnSpc>
+                <a:spcPct val="130000"/>
+              </a:lnSpc>
+              <a:spcBef>
+                <a:spcPts val="600"/>
+              </a:spcBef>
+              <a:spcAft>
+                <a:spcPts val="0"/>
+              </a:spcAft>
+              <a:defRPr sz="1800" b="0" i="0">
+                <a:latin typeface="Calibri"/>
+              </a:defRPr>
+            </a:pPr>
+            <a:r>
+              <a:rPr lang="en-US" dirty="0"/>
+              <a:t>•   Precision at threshold 0.5 : ~18% vs 1.3% </a:t>
+            </a:r>
+          </a:p>
+          <a:p>
+            <a:pPr>
+              <a:lnSpc>
+                <a:spcPct val="130000"/>
+              </a:lnSpc>
+              <a:spcBef>
+                <a:spcPts val="600"/>
+              </a:spcBef>
+              <a:spcAft>
+                <a:spcPts val="0"/>
+              </a:spcAft>
+              <a:defRPr sz="1800" b="0" i="0">
+                <a:latin typeface="Calibri"/>
+              </a:defRPr>
+            </a:pPr>
+            <a:r>
+              <a:rPr lang="en-US" dirty="0"/>
+              <a:t>•   Recall at threshold 0.5 : the model finds ~56% of all enhancer bases at that threshold</a:t>
+            </a:r>
+          </a:p>
+          <a:p>
+            <a:pPr>
+              <a:lnSpc>
+                <a:spcPct val="130000"/>
+              </a:lnSpc>
+              <a:spcBef>
+                <a:spcPts val="400"/>
+              </a:spcBef>
+              <a:spcAft>
+                <a:spcPts val="0"/>
+              </a:spcAft>
+              <a:defRPr sz="1700" b="0" i="0">
+                <a:latin typeface="Calibri"/>
+              </a:defRPr>
+            </a:pPr>
+            <a:r>
               <a:rPr dirty="0"/>
-              <a:t>•   AUPRC chance baseline: 0.013 (the chr10 positive rate)</a:t>
-            </a:r>
-          </a:p>
-          <a:p>
-            <a:pPr>
-              <a:lnSpc>
-                <a:spcPct val="130000"/>
-              </a:lnSpc>
-              <a:spcBef>
-                <a:spcPts val="600"/>
-              </a:spcBef>
-              <a:spcAft>
-                <a:spcPts val="0"/>
-              </a:spcAft>
-              <a:defRPr sz="1800" b="0" i="0">
-                <a:latin typeface="Calibri"/>
-              </a:defRPr>
-            </a:pPr>
-            <a:r>
-              <a:rPr dirty="0"/>
-              <a:t>•   Pretrained reaches 21x above chance; from-scratch reaches 13x</a:t>
-            </a:r>
-          </a:p>
-          <a:p>
-            <a:pPr>
-              <a:lnSpc>
-                <a:spcPct val="130000"/>
-              </a:lnSpc>
-              <a:spcBef>
-                <a:spcPts val="600"/>
-              </a:spcBef>
-              <a:spcAft>
-                <a:spcPts val="0"/>
-              </a:spcAft>
-              <a:defRPr sz="1800" b="0" i="0">
-                <a:latin typeface="Calibri"/>
-              </a:defRPr>
-            </a:pPr>
-            <a:r>
-              <a:rPr dirty="0"/>
-              <a:t>•   Relative AUPRC improvement from pretraining: ~60%</a:t>
-            </a:r>
-          </a:p>
-          <a:p>
-            <a:pPr>
-              <a:lnSpc>
-                <a:spcPct val="130000"/>
-              </a:lnSpc>
-              <a:spcBef>
-                <a:spcPts val="600"/>
-              </a:spcBef>
-              <a:spcAft>
-                <a:spcPts val="0"/>
-              </a:spcAft>
-              <a:defRPr sz="1800" b="0" i="0">
-                <a:latin typeface="Calibri"/>
-              </a:defRPr>
-            </a:pPr>
-            <a:r>
-              <a:rPr dirty="0"/>
-              <a:t>•   AUROC gain (+0.044) translates to substantial discrimination improvement on this imbalanced task</a:t>
-            </a:r>
-          </a:p>
-          <a:p>
-            <a:pPr>
-              <a:lnSpc>
-                <a:spcPct val="130000"/>
-              </a:lnSpc>
-              <a:spcBef>
-                <a:spcPts val="600"/>
-              </a:spcBef>
-              <a:spcAft>
-                <a:spcPts val="0"/>
-              </a:spcAft>
-              <a:defRPr sz="1800" b="0" i="0">
-                <a:latin typeface="Calibri"/>
-              </a:defRPr>
-            </a:pPr>
-            <a:r>
-              <a:rPr dirty="0"/>
-              <a:t>•   Precision at threshold 0.5 means: when the model says "enhancer," it is right ~18% of the time (vs 1.3% by random</a:t>
-            </a:r>
-            <a:br>
-              <a:rPr lang="en-US" dirty="0"/>
-            </a:br>
-            <a:r>
-              <a:rPr lang="en-US" dirty="0"/>
-              <a:t>     </a:t>
-            </a:r>
-            <a:r>
-              <a:rPr dirty="0"/>
-              <a:t>guessing)</a:t>
-            </a:r>
-          </a:p>
-          <a:p>
-            <a:pPr>
-              <a:lnSpc>
-                <a:spcPct val="130000"/>
-              </a:lnSpc>
-              <a:spcBef>
-                <a:spcPts val="600"/>
-              </a:spcBef>
-              <a:spcAft>
-                <a:spcPts val="0"/>
-              </a:spcAft>
-              <a:defRPr sz="1800" b="0" i="0">
-                <a:latin typeface="Calibri"/>
-              </a:defRPr>
-            </a:pPr>
-            <a:r>
-              <a:rPr dirty="0"/>
-              <a:t>•   Recall at threshold 0.5 means: the model finds ~56% of all enhancer bases at that threshold</a:t>
+              <a:t>•   Best F1 across thresholds: 0.33 (pretrained) vs 0.25 (from-scratch), confirming pretrained is better at every operating point</a:t>
             </a:r>
           </a:p>
         </p:txBody>
@@ -9880,8 +10107,8 @@
         </p:blipFill>
         <p:spPr>
           <a:xfrm>
-            <a:off x="502920" y="1051560"/>
-            <a:ext cx="3456432" cy="2468880"/>
+            <a:off x="119377" y="1198189"/>
+            <a:ext cx="4046223" cy="2890159"/>
           </a:xfrm>
           <a:prstGeom prst="rect">
             <a:avLst/>
@@ -9904,8 +10131,8 @@
         </p:blipFill>
         <p:spPr>
           <a:xfrm>
-            <a:off x="4370832" y="1051560"/>
-            <a:ext cx="6295644" cy="2464574"/>
+            <a:off x="4403652" y="1090079"/>
+            <a:ext cx="7540943" cy="2952075"/>
           </a:xfrm>
           <a:prstGeom prst="rect">
             <a:avLst/>
@@ -9920,7 +10147,7 @@
         </p:nvSpPr>
         <p:spPr>
           <a:xfrm>
-            <a:off x="502919" y="3566160"/>
+            <a:off x="457200" y="4196918"/>
             <a:ext cx="3598025" cy="520784"/>
           </a:xfrm>
           <a:prstGeom prst="rect">
@@ -9999,7 +10226,7 @@
         </p:nvSpPr>
         <p:spPr>
           <a:xfrm>
-            <a:off x="4370832" y="3566160"/>
+            <a:off x="7334166" y="4196918"/>
             <a:ext cx="6295644" cy="640080"/>
           </a:xfrm>
           <a:prstGeom prst="rect">
@@ -10062,7 +10289,7 @@
         </p:nvSpPr>
         <p:spPr>
           <a:xfrm>
-            <a:off x="548640" y="4434840"/>
+            <a:off x="502919" y="4892040"/>
             <a:ext cx="11155680" cy="1554480"/>
           </a:xfrm>
           <a:prstGeom prst="rect">
@@ -10165,54 +10392,6 @@
             <a:r>
               <a:rPr dirty="0"/>
               <a:t>•   Pretrained leads on precision below threshold 0.9 and on recall above 0.3</a:t>
-            </a:r>
-          </a:p>
-        </p:txBody>
-      </p:sp>
-      <p:sp>
-        <p:nvSpPr>
-          <p:cNvPr id="8" name="TextBox 7"/>
-          <p:cNvSpPr txBox="1"/>
-          <p:nvPr/>
-        </p:nvSpPr>
-        <p:spPr>
-          <a:xfrm>
-            <a:off x="548640" y="5989320"/>
-            <a:ext cx="11155680" cy="822960"/>
-          </a:xfrm>
-          <a:prstGeom prst="rect">
-            <a:avLst/>
-          </a:prstGeom>
-          <a:noFill/>
-        </p:spPr>
-        <p:txBody>
-          <a:bodyPr wrap="square">
-            <a:spAutoFit/>
-          </a:bodyPr>
-          <a:lstStyle/>
-          <a:p>
-            <a:pPr algn="l">
-              <a:lnSpc>
-                <a:spcPct val="130000"/>
-              </a:lnSpc>
-              <a:spcBef>
-                <a:spcPts val="0"/>
-              </a:spcBef>
-              <a:spcAft>
-                <a:spcPts val="0"/>
-              </a:spcAft>
-            </a:pPr>
-            <a:r>
-              <a:rPr sz="1800" b="1">
-                <a:latin typeface="Calibri"/>
-              </a:rPr>
-              <a:t>Takeaway: </a:t>
-            </a:r>
-            <a:r>
-              <a:rPr sz="1800" b="0">
-                <a:latin typeface="Calibri"/>
-              </a:rPr>
-              <a:t>improvement holds across both enhancer subtype and threshold, not specific to a single operating point.</a:t>
             </a:r>
           </a:p>
         </p:txBody>

--- a/slides/K562_enhancer_prediction.pptx
+++ b/slides/K562_enhancer_prediction.pptx
@@ -376,62 +376,70 @@
           <a:lstStyle/>
           <a:p>
             <a:r>
+              <a:rPr dirty="0"/>
               <a:t>Strong test metrics raise the next question. What is the model actually paying attention to in the DNA? Did it learn known K562 transcription factor binding motifs, or is it relying on something else?</a:t>
             </a:r>
           </a:p>
           <a:p>
-            <a:endParaRPr/>
-          </a:p>
-          <a:p>
-            <a:r>
+            <a:endParaRPr dirty="0"/>
+          </a:p>
+          <a:p>
+            <a:r>
+              <a:rPr dirty="0"/>
               <a:t>To answer that, I ran in silico mutagenesis on the top 1,000 highest-confidence chr10 predictions. For each one, I mutated every base in a 51 base-pair window around the prediction and recorded how much the prediction changed. Bases that drop the prediction when mutated are the bases the model relies on. This gives a saliency profile per position.</a:t>
             </a:r>
           </a:p>
           <a:p>
-            <a:endParaRPr/>
-          </a:p>
-          <a:p>
-            <a:r>
+            <a:endParaRPr dirty="0"/>
+          </a:p>
+          <a:p>
+            <a:r>
+              <a:rPr dirty="0"/>
               <a:t>I then clustered the 1,000 profiles into 10 groups based on shape similarity. For each cluster, I built a position weight matrix from the underlying DNA sequences and compared it against JASPAR's database of known TF binding motifs using IC-weighted Pearson correlation across offset alignments.</a:t>
             </a:r>
           </a:p>
           <a:p>
-            <a:endParaRPr/>
-          </a:p>
-          <a:p>
-            <a:r>
+            <a:endParaRPr dirty="0"/>
+          </a:p>
+          <a:p>
+            <a:r>
+              <a:rPr dirty="0"/>
               <a:t>Four clusters had meaningful matches to known K562 transcription factors. Cluster 0 with 130 members matched GATA1 at score 0.738. Cluster 1 with 40 members matched Sp1 at 0.562. Cluster 2 with 739 members matched Sp1 at 0.570. Cluster 4 with 79 members matched MYB at 0.666. At first glance this looks like a strong result. GATA1 is the master regulator of erythroid biology and a defining K562 TF. MYB is canonical in leukemia.</a:t>
             </a:r>
           </a:p>
           <a:p>
-            <a:endParaRPr/>
-          </a:p>
-          <a:p>
-            <a:r>
+            <a:endParaRPr dirty="0"/>
+          </a:p>
+          <a:p>
+            <a:r>
+              <a:rPr dirty="0"/>
               <a:t>But the cluster PWMs themselves tell a different story. Look at the figure. The left column shows the cluster PWMs, with the y-axis zoomed to 0 to 0.3 bits. The right column shows the matching JASPAR motifs at their natural 0 to 2 bits scale. The dashed line in the cluster panels marks 1.0 bits, which is roughly where a typical TF motif position sits. The visual scale difference is the entire point. JASPAR motifs reach 1.5 to 2 bits at their peaks. The cluster PWMs cap out around 0.2 to 0.3 bits, an order of magnitude weaker.</a:t>
             </a:r>
           </a:p>
           <a:p>
-            <a:endParaRPr/>
-          </a:p>
-          <a:p>
-            <a:r>
+            <a:endParaRPr dirty="0"/>
+          </a:p>
+          <a:p>
+            <a:r>
+              <a:rPr dirty="0"/>
               <a:t>The letter content also fails the eye test. The GATA1 cluster shows G and C enrichment, not the A and T pattern GATA1 binding requires. The MYB cluster is similar. The Sp1 matches are the most defensible since Sp1 binds GC-rich boxes and the model's preferences are GC-flavored, but even there the signal is much weaker than real Sp1 binding sites.</a:t>
             </a:r>
           </a:p>
           <a:p>
-            <a:endParaRPr/>
-          </a:p>
-          <a:p>
-            <a:r>
+            <a:endParaRPr dirty="0"/>
+          </a:p>
+          <a:p>
+            <a:r>
+              <a:rPr dirty="0"/>
               <a:t>The conclusion is that the model uses regional GC-rich composition consistent with CpG-island context, not specific TF binding motifs. This lines up with the stratified result: compositional features are strongest near promoters, which is where the model does best.</a:t>
             </a:r>
           </a:p>
           <a:p>
-            <a:endParaRPr/>
-          </a:p>
-          <a:p>
-            <a:r>
+            <a:endParaRPr dirty="0"/>
+          </a:p>
+          <a:p>
+            <a:r>
+              <a:rPr dirty="0"/>
               <a:t>Someone might ask whether I did anything beyond JASPAR matching. Yes, a peak-saliency realignment test that's in the report. When I realigned each cluster member to its peak-attention position, match scores collapsed rather than sharpened. If a real motif had been present, alignment would have sharpened the signal. The collapse confirms the matches were compositional.</a:t>
             </a:r>
           </a:p>
@@ -643,30 +651,34 @@
           <a:lstStyle/>
           <a:p>
             <a:r>
+              <a:rPr dirty="0"/>
               <a:t>Predicting enhancers from DNA sequence is biologically valuable. Enhancers turn on genes, they're cell-type specific, and experimentally mapping them across all cell types is expensive. A sequence-based predictor could fill in these gaps and help us understand what features make a stretch of DNA function as an enhancer in one cell type but not another. I worked with K562, a leukemia cell line that ENCODE has profiled deeply, so reliable ground truth labels exist.</a:t>
             </a:r>
           </a:p>
           <a:p>
-            <a:endParaRPr/>
-          </a:p>
-          <a:p>
-            <a:r>
+            <a:endParaRPr dirty="0"/>
+          </a:p>
+          <a:p>
+            <a:r>
+              <a:rPr dirty="0"/>
               <a:t>But there's a broader question I wanted to test. Deep learning models for regulatory genomics are usually trained for one specific task at a time. Puffin-D, the architecture I used here, was originally designed by the Zhou Lab for predicting transcription start sites and core promoter elements. Promoters and enhancers share underlying biology. Both involve transcription factors binding short DNA motifs in regional compositional context. But they differ meaningfully. Promoters sit at gene starts; enhancers can be hundreds of kilobases away. Promoters are mostly cell-type-independent; enhancers are highly cell-type-specific. So the question becomes: does the Puffin-D architecture capture something general about regulatory DNA, or is it specialized to promoter biology?</a:t>
             </a:r>
           </a:p>
           <a:p>
-            <a:endParaRPr/>
-          </a:p>
-          <a:p>
-            <a:r>
+            <a:endParaRPr dirty="0"/>
+          </a:p>
+          <a:p>
+            <a:r>
+              <a:rPr dirty="0"/>
               <a:t>I tested this two ways. First, I trained the architecture from scratch with randomly initialized weights, on K562 enhancer labels. This isolates the question of whether the architecture itself is a good fit for enhancer prediction. If it learns well from scratch, the answer is yes. Second, I trained the same architecture starting from Puffin-D's pretrained weights, fine-tuned on K562 enhancer labels. This tests whether the specific learned weights from promoter training transfer to enhancer prediction. If pretrained outperforms from-scratch, the answer is yes, and we've shown that Puffin-D has learned representations that generalize across regulatory tasks.</a:t>
             </a:r>
           </a:p>
           <a:p>
-            <a:endParaRPr/>
-          </a:p>
-          <a:p>
-            <a:r>
+            <a:endParaRPr dirty="0"/>
+          </a:p>
+          <a:p>
+            <a:r>
+              <a:rPr dirty="0"/>
               <a:t>Both experiments share identical training data, splits, batch size, learning rate, and loss function. The only difference between the two models is the initialization. This makes the comparison clean. Let me show you the setup and then the results.</a:t>
             </a:r>
           </a:p>
@@ -737,38 +749,99 @@
           <a:lstStyle/>
           <a:p>
             <a:r>
-              <a:t>Our labels come from intersecting two ENCODE resources. The cCRE annotations are from ENCODE SCREEN v3 and define roughly a million candidate regulatory regions across the genome, based on accessibility and histone marks. The K562 H3K27ac ChIP-seq, accession ENCFF066IUT, tells us which of those candidate elements are actually active in K562 specifically. H3K27ac is the standard histone mark for active enhancers and promoters, so it's what ENCODE itself uses to subcategorize regulatory elements. A base is labeled positive if it sits within a cCRE that overlaps a K562 H3K27ac peak. I built this intersection with bedtools and then projected it onto per-base label arrays for each chromosome.</a:t>
-            </a:r>
-          </a:p>
-          <a:p>
-            <a:endParaRPr/>
-          </a:p>
-          <a:p>
-            <a:r>
-              <a:t>The cCRE annotations distinguish two enhancer subcategories that matter for the analysis. pELS, proximal enhancer-like elements, sit within 2 kilobases of a transcription start site. dELS, distal elements, sit further away. This split matters because proximal elements share sequence properties with nearby promoters, so they're partially predictable from promoter-like features, while distal elements depend more on cell-type-specific transcription factor binding and are intrinsically harder.</a:t>
-            </a:r>
-          </a:p>
-          <a:p>
-            <a:endParaRPr/>
-          </a:p>
-          <a:p>
-            <a:r>
+              <a:rPr dirty="0"/>
+              <a:t>Our labels come from intersecting two ENCODE resources. The </a:t>
+            </a:r>
+            <a:r>
+              <a:rPr dirty="0" err="1"/>
+              <a:t>cCRE</a:t>
+            </a:r>
+            <a:r>
+              <a:rPr dirty="0"/>
+              <a:t> annotations are from ENCODE SCREEN v3 and define roughly a million candidate regulatory regions across the genome, based on accessibility and histone marks. The K562 H3K27ac </a:t>
+            </a:r>
+            <a:r>
+              <a:rPr dirty="0" err="1"/>
+              <a:t>ChIP</a:t>
+            </a:r>
+            <a:r>
+              <a:rPr dirty="0"/>
+              <a:t>-seq, accession ENCFF066IUT, tells us which of those candidate elements are actually active in K562 specifically. H3K27ac is the standard histone mark for active enhancers and promoters, so it's what ENCODE itself uses to subcategorize regulatory elements. A base is labeled positive if it sits within a </a:t>
+            </a:r>
+            <a:r>
+              <a:rPr dirty="0" err="1"/>
+              <a:t>cCRE</a:t>
+            </a:r>
+            <a:r>
+              <a:rPr dirty="0"/>
+              <a:t> that overlaps a K562 H3K27ac peak. I built this intersection with </a:t>
+            </a:r>
+            <a:r>
+              <a:rPr dirty="0" err="1"/>
+              <a:t>bedtools</a:t>
+            </a:r>
+            <a:r>
+              <a:rPr dirty="0"/>
+              <a:t> and then projected it onto per-base label arrays for each chromosome.</a:t>
+            </a:r>
+          </a:p>
+          <a:p>
+            <a:endParaRPr dirty="0"/>
+          </a:p>
+          <a:p>
+            <a:r>
+              <a:rPr dirty="0"/>
+              <a:t>The </a:t>
+            </a:r>
+            <a:r>
+              <a:rPr dirty="0" err="1"/>
+              <a:t>cCRE</a:t>
+            </a:r>
+            <a:r>
+              <a:rPr dirty="0"/>
+              <a:t> annotations distinguish two enhancer subcategories that matter for the analysis. </a:t>
+            </a:r>
+            <a:r>
+              <a:rPr dirty="0" err="1"/>
+              <a:t>pELS</a:t>
+            </a:r>
+            <a:r>
+              <a:rPr dirty="0"/>
+              <a:t>, proximal enhancer-like elements, sit within 2 kilobases of a transcription start site. </a:t>
+            </a:r>
+            <a:r>
+              <a:rPr dirty="0" err="1"/>
+              <a:t>dELS</a:t>
+            </a:r>
+            <a:r>
+              <a:rPr dirty="0"/>
+              <a:t>, distal elements, sit further away. This split matters because proximal elements share sequence properties with nearby promoters, so they're partially predictable from promoter-like features, while distal elements depend more on cell-type-specific transcription factor binding and are intrinsically harder.</a:t>
+            </a:r>
+          </a:p>
+          <a:p>
+            <a:endParaRPr dirty="0"/>
+          </a:p>
+          <a:p>
+            <a:r>
+              <a:rPr dirty="0"/>
               <a:t>The chromosome splits keep the test set strictly separated from training. Training uses chromosomes 1 through 7 and 11 through 20. Validation is chromosome 21. Chromosome 10 is the held-out test set. Splitting by whole chromosomes is important. If you split positions randomly within a chromosome, the model sees local homology and repeats during both training and test, which inflates the metrics. Whole-chromosome splits eliminate that leakage.</a:t>
             </a:r>
           </a:p>
           <a:p>
-            <a:endParaRPr/>
-          </a:p>
-          <a:p>
-            <a:r>
+            <a:endParaRPr dirty="0"/>
+          </a:p>
+          <a:p>
+            <a:r>
+              <a:rPr dirty="0"/>
               <a:t>One number to keep in mind: only 1.3% of chr10 bases are enhancer-positive. That's the chance baseline for AUPRC, which means a useful model needs to land well above 0.013 to be meaningful.</a:t>
             </a:r>
           </a:p>
           <a:p>
-            <a:endParaRPr/>
-          </a:p>
-          <a:p>
-            <a:r>
+            <a:endParaRPr dirty="0"/>
+          </a:p>
+          <a:p>
+            <a:r>
+              <a:rPr dirty="0"/>
               <a:t>Someone might ask why I used H3K27ac and not p300 or another mark. H3K27ac is the standard mark for active regulatory elements. The K562 data is abundant and clean, and it's what ENCODE itself uses to define the ELS subcategories.</a:t>
             </a:r>
           </a:p>
@@ -839,40 +912,114 @@
           <a:lstStyle/>
           <a:p>
             <a:r>
-              <a:t>Puffin-D was developed by the Zhou Lab here at UChicago. It's a CNN architecture originally designed to predict transcription start sites and core promoter elements, things like the TATA box, the Initiator sequence, and CpG island context. The architecture has two key properties that make it well-suited for regulatory sequence prediction. First, it uses dilated convolutions, which expand the receptive field of each layer without losing per-base resolution. This means a single per-base prediction can be informed by context tens of thousands of bases away, which matters because regulatory elements often depend on long-range sequence context. Second, the model is organized as a double U-Net: the input is downsampled through strided convolutions to a low-resolution bottleneck embedding, then upsampled back to per-base resolution through skip connections. Two U-Nets stacked allows the model to integrate local sequence detail with broader regional patterns.</a:t>
-            </a:r>
-          </a:p>
-          <a:p>
-            <a:endParaRPr/>
-          </a:p>
-          <a:p>
-            <a:r>
-              <a:t>The input format is a 100,000 base pair window of DNA, one-hot encoded as four channels for A, C, G, and T. Each base in the input gets its own prediction at the output.</a:t>
-            </a:r>
-          </a:p>
-          <a:p>
-            <a:endParaRPr/>
-          </a:p>
-          <a:p>
-            <a:r>
+              <a:rPr lang="en-US" dirty="0"/>
+              <a:t>Puffin-D is a CNN architecture originally designed to predict transcription start sites and core promoter elements, things like the TATA box, the Initiator sequence, and CpG island context.</a:t>
+            </a:r>
+            <a:br>
+              <a:rPr lang="en-US" dirty="0"/>
+            </a:br>
+            <a:endParaRPr lang="en-US" dirty="0"/>
+          </a:p>
+          <a:p>
+            <a:r>
+              <a:rPr lang="en-US" dirty="0"/>
+              <a:t>The input format is a 100,000 base pair window of DNA, one-hot encoded as four channels for A, C, G, and T. Each base in the input gets its own prediction at the output, which is what makes this architecture suited for problems where you want to label every position rather than just classify the whole window.</a:t>
+            </a:r>
+          </a:p>
+          <a:p>
+            <a:r>
+              <a:rPr lang="en-US" dirty="0"/>
+              <a:t>Let me walk through the two structural ideas that make Puffin-D work for long genomic sequences.</a:t>
+            </a:r>
+            <a:br>
+              <a:rPr lang="en-US" dirty="0"/>
+            </a:br>
+            <a:endParaRPr lang="en-US" dirty="0"/>
+          </a:p>
+          <a:p>
+            <a:r>
+              <a:rPr lang="en-US" dirty="0"/>
+              <a:t>The first is dilated convolutions. A standard convolution looks at neighboring positions when computing a feature at each location. A 3-wide standard convolution at position 50,000 looks at positions 49,999, 50,000, and 50,001. That's a narrow view. To capture context from far away, you'd normally need to stack many layers, which gets expensive. Dilated convolutions solve this by inserting gaps. A 3-wide dilated convolution with dilation 8 at position 50,000 looks at positions 49,992, 50,000, and 50,008. The kernel skips over intermediate positions. By stacking layers with increasing dilation, the receptive field grows exponentially without losing per-base resolution. After a handful of layers, a single per-base prediction can be informed by context tens of thousands of bases away. This matters because enhancers can depend on sequence patterns at distances that simple stacked CNNs cannot see efficiently.</a:t>
+            </a:r>
+            <a:br>
+              <a:rPr lang="en-US" dirty="0"/>
+            </a:br>
+            <a:endParaRPr lang="en-US" dirty="0"/>
+          </a:p>
+          <a:p>
+            <a:r>
+              <a:rPr lang="en-US" dirty="0"/>
+              <a:t>The second is the U-Net structure. A U-Net has two halves. The left half is the encoder. It takes the 100 kb input and progressively </a:t>
+            </a:r>
+            <a:r>
+              <a:rPr lang="en-US" dirty="0" err="1"/>
+              <a:t>downsamples</a:t>
+            </a:r>
+            <a:r>
+              <a:rPr lang="en-US" dirty="0"/>
+              <a:t> it through </a:t>
+            </a:r>
+            <a:r>
+              <a:rPr lang="en-US" dirty="0" err="1"/>
+              <a:t>strided</a:t>
+            </a:r>
+            <a:r>
+              <a:rPr lang="en-US" dirty="0"/>
+              <a:t> convolutions. A stride-2 convolution skips every other position, cutting the sequence length in half while letting each position represent a wider neighborhood. After several stride-2 layers, the 100,000 base pair input is compressed down to a low-resolution bottleneck embedding that summarizes regional context. The right half is the decoder. It </a:t>
+            </a:r>
+            <a:r>
+              <a:rPr lang="en-US" dirty="0" err="1"/>
+              <a:t>upsamples</a:t>
+            </a:r>
+            <a:r>
+              <a:rPr lang="en-US" dirty="0"/>
+              <a:t> the bottleneck back to the original 100 kb length and uses skip connections from the encoder to recover fine-grained per-base detail. Skip connections matter because pure </a:t>
+            </a:r>
+            <a:r>
+              <a:rPr lang="en-US" dirty="0" err="1"/>
+              <a:t>downsampling</a:t>
+            </a:r>
+            <a:r>
+              <a:rPr lang="en-US" dirty="0"/>
+              <a:t>-then-</a:t>
+            </a:r>
+            <a:r>
+              <a:rPr lang="en-US" dirty="0" err="1"/>
+              <a:t>upsampling</a:t>
+            </a:r>
+            <a:r>
+              <a:rPr lang="en-US" dirty="0"/>
+              <a:t> would blur the output, losing position-specific information. Skip connections directly carry detail from the encoder side over to the decoder side at the same resolution. Puffin-D stacks two of these U-Nets back to back, which gives the model two passes at integrating local sequence detail with broader regional patterns.</a:t>
+            </a:r>
+            <a:br>
+              <a:rPr lang="en-US" dirty="0"/>
+            </a:br>
+            <a:endParaRPr lang="en-US" dirty="0"/>
+          </a:p>
+          <a:p>
+            <a:r>
+              <a:rPr lang="en-US" dirty="0"/>
               <a:t>Puffin-D was trained on a large mammalian genomic dataset that includes ENCODE CAGE-seq for transcription start sites, annotations for core promoter elements, and multi-species comparative genomics. The learned weights encode what short regulatory motifs look like, how they're positioned relative to functional sites, and what broader compositional patterns characterize active regulatory regions.</a:t>
             </a:r>
-          </a:p>
-          <a:p>
-            <a:endParaRPr/>
-          </a:p>
-          <a:p>
-            <a:r>
+            <a:br>
+              <a:rPr lang="en-US" dirty="0"/>
+            </a:br>
+            <a:endParaRPr lang="en-US" dirty="0"/>
+          </a:p>
+          <a:p>
+            <a:r>
+              <a:rPr lang="en-US" dirty="0"/>
               <a:t>On the right side of the slide I've broken out the structural details into bullets so the architecture is concrete: a 100 kilobase one-hot DNA input, dilated convolutions throughout the network, the double U-Net layout with skip connections, and per-base outputs across the input window.</a:t>
             </a:r>
           </a:p>
           <a:p>
-            <a:endParaRPr/>
-          </a:p>
-          <a:p>
-            <a:r>
+            <a:r>
+              <a:rPr lang="en-US" dirty="0"/>
               <a:t>In the next slide I'll show how I adapted this architecture for the K562 enhancer task and what the training setup looked like.</a:t>
             </a:r>
+          </a:p>
+          <a:p>
+            <a:endParaRPr dirty="0"/>
           </a:p>
         </p:txBody>
       </p:sp>
@@ -1208,46 +1355,52 @@
           <a:lstStyle/>
           <a:p>
             <a:r>
+              <a:rPr dirty="0"/>
               <a:t>The first place we see the effect of pretraining is in the training curves themselves. The left panel plots training loss, specifically binary cross-entropy, against epoch. Lower is better. The right panel plots validation AUROC against epoch, where higher is better.</a:t>
             </a:r>
           </a:p>
           <a:p>
-            <a:endParaRPr/>
-          </a:p>
-          <a:p>
-            <a:r>
+            <a:endParaRPr dirty="0"/>
+          </a:p>
+          <a:p>
+            <a:r>
+              <a:rPr dirty="0"/>
               <a:t>The blue curve in both panels is the from-scratch model. It starts at high training loss around 0.55 and decreases gradually over 35 epochs, ending around 0.18. Its validation AUROC starts near 0.6 and works upward to roughly 0.85 to 0.93 by the end.</a:t>
             </a:r>
           </a:p>
           <a:p>
-            <a:endParaRPr/>
-          </a:p>
-          <a:p>
-            <a:r>
+            <a:endParaRPr dirty="0"/>
+          </a:p>
+          <a:p>
+            <a:r>
+              <a:rPr dirty="0"/>
               <a:t>The orange curve is the pretrained model. Look at where its training loss starts on the left panel. It's already at about 0.15 at epoch zero, before any fine-tuning on enhancer data. That's because the Puffin-D backbone weights already understand DNA structure from the promoter pretraining. Pretrained then drops further and converges by epoch 7. On validation AUROC, pretrained reaches above 0.98 within 3 epochs and stays there. The annotation marks the pretrained best at epoch 3, which is the checkpoint I selected for the test set evaluation.</a:t>
             </a:r>
           </a:p>
           <a:p>
-            <a:endParaRPr/>
-          </a:p>
-          <a:p>
-            <a:r>
+            <a:endParaRPr dirty="0"/>
+          </a:p>
+          <a:p>
+            <a:r>
+              <a:rPr dirty="0"/>
               <a:t>A note on the validation curve for from-scratch: it looks noisy because the validation set has only 50 windows. Small validation sets produce bouncy metrics. This is why I rely on the chr10 test set, which is much larger, for the actual model comparison. The validation curves were used for early stopping and learning rate decay, not for the final comparison.</a:t>
             </a:r>
           </a:p>
           <a:p>
-            <a:endParaRPr/>
-          </a:p>
-          <a:p>
-            <a:r>
+            <a:endParaRPr dirty="0"/>
+          </a:p>
+          <a:p>
+            <a:r>
+              <a:rPr dirty="0"/>
               <a:t>The 5x reduction in epochs translates to roughly a 5x reduction in wall-clock training time. The pretrained features are useful from epoch zero. They are not learned during fine-tuning. This is the first piece of evidence that the transferred weights carry information that genuinely bootstraps enhancer learning.</a:t>
             </a:r>
           </a:p>
           <a:p>
-            <a:endParaRPr/>
-          </a:p>
-          <a:p>
-            <a:r>
+            <a:endParaRPr dirty="0"/>
+          </a:p>
+          <a:p>
+            <a:r>
+              <a:rPr dirty="0"/>
               <a:t>Someone might ask whether I tried other pretrained models. Puffin-D was chosen specifically because it is CNN-based, takes 100 kilobase input like ours, and was trained on a related task. Other available genomic models would require different input formatting.</a:t>
             </a:r>
           </a:p>
@@ -1428,71 +1581,208 @@
           <a:lstStyle/>
           <a:p>
             <a:r>
+              <a:rPr dirty="0"/>
               <a:t>I wanted to check whether the improvement from pretraining is genuine or whether it depends on cherry-picking one evaluation choice. Two checks.</a:t>
             </a:r>
           </a:p>
           <a:p>
-            <a:endParaRPr/>
-          </a:p>
-          <a:p>
-            <a:r>
-              <a:t>On the left, the stratified AUROC figure. The y-axis is AUROC, where higher is better. The x-axis has two categories: pELS for proximal enhancers within 2 kilobases of a TSS, and dELS for distal enhancers further away. The numbers above each bar are the AUROC values. From-scratch reaches 0.841 on pELS and 0.773 on dELS. Pretrained reaches 0.902 on pELS and 0.854 on dELS.</a:t>
-            </a:r>
-          </a:p>
-          <a:p>
-            <a:endParaRPr/>
-          </a:p>
-          <a:p>
-            <a:r>
-              <a:t>Both models do better on pELS than on dELS. That's expected because proximal enhancers share sequence signal with the adjacent promoters they sit near, so they're partially predictable from promoter-like features. Distal enhancers depend more on cell-type-specific transcription factor binding patterns and are intrinsically harder.</a:t>
-            </a:r>
-          </a:p>
-          <a:p>
-            <a:endParaRPr/>
-          </a:p>
-          <a:p>
-            <a:r>
-              <a:t>The interesting finding is the gap. The improvement on pELS is +0.061. The improvement on dELS is +0.081. Pretraining helps more on the harder distal category. If pretraining had only helped on pELS, the natural concern would be that it just imported promoter knowledge that doesn't generalize. The fact that it helps more on dELS says the transferred features are useful beyond promoter-adjacent regions.</a:t>
-            </a:r>
-          </a:p>
-          <a:p>
-            <a:endParaRPr/>
-          </a:p>
-          <a:p>
-            <a:r>
+            <a:endParaRPr dirty="0"/>
+          </a:p>
+          <a:p>
+            <a:r>
+              <a:rPr dirty="0"/>
+              <a:t>On the left, the stratified AUROC figure. The y-axis is AUROC, where higher is better. The x-axis has two categories: </a:t>
+            </a:r>
+            <a:r>
+              <a:rPr dirty="0" err="1"/>
+              <a:t>pELS</a:t>
+            </a:r>
+            <a:r>
+              <a:rPr dirty="0"/>
+              <a:t> for proximal enhancers within 2 kilobases of a TSS, and </a:t>
+            </a:r>
+            <a:r>
+              <a:rPr dirty="0" err="1"/>
+              <a:t>dELS</a:t>
+            </a:r>
+            <a:r>
+              <a:rPr dirty="0"/>
+              <a:t> for distal enhancers further away. The numbers above each bar are the AUROC values. From-scratch reaches 0.841 on </a:t>
+            </a:r>
+            <a:r>
+              <a:rPr dirty="0" err="1"/>
+              <a:t>pELS</a:t>
+            </a:r>
+            <a:r>
+              <a:rPr dirty="0"/>
+              <a:t> and 0.773 on </a:t>
+            </a:r>
+            <a:r>
+              <a:rPr dirty="0" err="1"/>
+              <a:t>dELS</a:t>
+            </a:r>
+            <a:r>
+              <a:rPr dirty="0"/>
+              <a:t>. Pretrained reaches 0.902 on </a:t>
+            </a:r>
+            <a:r>
+              <a:rPr dirty="0" err="1"/>
+              <a:t>pELS</a:t>
+            </a:r>
+            <a:r>
+              <a:rPr dirty="0"/>
+              <a:t> and 0.854 on </a:t>
+            </a:r>
+            <a:r>
+              <a:rPr dirty="0" err="1"/>
+              <a:t>dELS</a:t>
+            </a:r>
+            <a:r>
+              <a:rPr dirty="0"/>
+              <a:t>.</a:t>
+            </a:r>
+          </a:p>
+          <a:p>
+            <a:endParaRPr dirty="0"/>
+          </a:p>
+          <a:p>
+            <a:r>
+              <a:rPr dirty="0"/>
+              <a:t>Both models do better on </a:t>
+            </a:r>
+            <a:r>
+              <a:rPr dirty="0" err="1"/>
+              <a:t>pELS</a:t>
+            </a:r>
+            <a:r>
+              <a:rPr dirty="0"/>
+              <a:t> than on </a:t>
+            </a:r>
+            <a:r>
+              <a:rPr dirty="0" err="1"/>
+              <a:t>dELS</a:t>
+            </a:r>
+            <a:r>
+              <a:rPr dirty="0"/>
+              <a:t>. That's expected because proximal enhancers share sequence signal with the adjacent promoters they sit near, so they're partially predictable from promoter-like features. Distal enhancers depend more on cell-type-specific transcription factor binding patterns and are intrinsically harder.</a:t>
+            </a:r>
+          </a:p>
+          <a:p>
+            <a:endParaRPr dirty="0"/>
+          </a:p>
+          <a:p>
+            <a:r>
+              <a:rPr dirty="0"/>
+              <a:t>The interesting finding is the gap. The improvement on </a:t>
+            </a:r>
+            <a:r>
+              <a:rPr dirty="0" err="1"/>
+              <a:t>pELS</a:t>
+            </a:r>
+            <a:r>
+              <a:rPr dirty="0"/>
+              <a:t> is +0.061. The improvement on </a:t>
+            </a:r>
+            <a:r>
+              <a:rPr dirty="0" err="1"/>
+              <a:t>dELS</a:t>
+            </a:r>
+            <a:r>
+              <a:rPr dirty="0"/>
+              <a:t> is +0.081. Pretraining helps more on the harder distal category. If pretraining had only helped on </a:t>
+            </a:r>
+            <a:r>
+              <a:rPr dirty="0" err="1"/>
+              <a:t>pELS</a:t>
+            </a:r>
+            <a:r>
+              <a:rPr dirty="0"/>
+              <a:t>, the natural concern would be that it just imported promoter knowledge that doesn't generalize. The fact that it helps more on </a:t>
+            </a:r>
+            <a:r>
+              <a:rPr dirty="0" err="1"/>
+              <a:t>dELS</a:t>
+            </a:r>
+            <a:r>
+              <a:rPr dirty="0"/>
+              <a:t> says the transferred features are useful beyond promoter-adjacent regions.</a:t>
+            </a:r>
+          </a:p>
+          <a:p>
+            <a:endParaRPr dirty="0"/>
+          </a:p>
+          <a:p>
+            <a:r>
+              <a:rPr dirty="0"/>
               <a:t>On the right, the threshold sweep. The x-axis is decision threshold, sweeping from 0.1 to 0.9. The left subplot y-axis is precision, the right subplot y-axis is recall. Each line is one model. As the threshold rises, the model becomes more selective: precision goes up, recall goes down. Standard tradeoff.</a:t>
             </a:r>
           </a:p>
           <a:p>
-            <a:endParaRPr/>
-          </a:p>
-          <a:p>
-            <a:r>
-              <a:t>Pretrained leads on precision at every threshold below 0.9. At threshold 0.9, from-scratch has slightly higher precision around 0.41 versus pretrained's 0.30, but its recall at that threshold is only 9% versus pretrained's 36%. So pretrained still dominates the useful operating range. On the recall side, pretrained leads at thresholds 0.3 and above. At threshold 0.1, from-scratch flags more bases overall and gets slightly higher recall, but at a precision cost.</a:t>
-            </a:r>
-          </a:p>
-          <a:p>
-            <a:endParaRPr/>
-          </a:p>
-          <a:p>
-            <a:r>
+            <a:endParaRPr dirty="0"/>
+          </a:p>
+          <a:p>
+            <a:r>
+              <a:rPr dirty="0"/>
+              <a:t>Pretrained leads on precision at every threshold below 0.9. At threshold 0.9, from-scratch has slightly higher precision around 0.41 versus </a:t>
+            </a:r>
+            <a:r>
+              <a:rPr dirty="0" err="1"/>
+              <a:t>pretrained's</a:t>
+            </a:r>
+            <a:r>
+              <a:rPr dirty="0"/>
+              <a:t> 0.30, but its recall at that threshold is only 9% versus </a:t>
+            </a:r>
+            <a:r>
+              <a:rPr dirty="0" err="1"/>
+              <a:t>pretrained's</a:t>
+            </a:r>
+            <a:r>
+              <a:rPr dirty="0"/>
+              <a:t> 36%. So pretrained still dominates the useful operating range. On the recall side, pretrained leads at thresholds 0.3 and above. At threshold 0.1, from-scratch flags more bases overall and gets slightly higher recall, but at a precision cost.</a:t>
+            </a:r>
+          </a:p>
+          <a:p>
+            <a:endParaRPr dirty="0"/>
+          </a:p>
+          <a:p>
+            <a:r>
+              <a:rPr dirty="0"/>
               <a:t>Combined message: the improvement isn't an artifact of one evaluation choice. It holds whether you split by enhancer subtype or sweep across thresholds.</a:t>
             </a:r>
           </a:p>
           <a:p>
-            <a:endParaRPr/>
-          </a:p>
-          <a:p>
-            <a:r>
+            <a:endParaRPr dirty="0"/>
+          </a:p>
+          <a:p>
+            <a:r>
+              <a:rPr dirty="0"/>
               <a:t>Someone might ask what operating point to use in practice. Threshold 0.5 is the sigmoid default. Higher thresholds suit candidate-validation use cases, lower thresholds suit broad screening.</a:t>
             </a:r>
           </a:p>
           <a:p>
-            <a:endParaRPr/>
-          </a:p>
-          <a:p>
-            <a:r>
-              <a:t>One thing to flag here: the stratified AUROC numbers also benefit from the same caveat as the overall AUROC. AUROC 0.85 on dELS sounds strong, but it's a ranking metric on a highly imbalanced subtype. The PR-curve characterization on this slide doesn't include separate stratified AUPRC, but if it did, the dELS AUPRC would be substantially lower in absolute terms than the AUROC suggests. The takeaway is the comparison between the two models, not the absolute performance on either subtype.</a:t>
+            <a:endParaRPr dirty="0"/>
+          </a:p>
+          <a:p>
+            <a:r>
+              <a:rPr dirty="0"/>
+              <a:t>One thing to flag here: the stratified AUROC numbers also benefit from the same caveat as the overall AUROC. AUROC 0.85 on </a:t>
+            </a:r>
+            <a:r>
+              <a:rPr dirty="0" err="1"/>
+              <a:t>dELS</a:t>
+            </a:r>
+            <a:r>
+              <a:rPr dirty="0"/>
+              <a:t> sounds strong, but it's a ranking metric on a highly imbalanced subtype. The PR-curve characterization on this slide doesn't include separate stratified AUPRC, but if it did, the </a:t>
+            </a:r>
+            <a:r>
+              <a:rPr dirty="0" err="1"/>
+              <a:t>dELS</a:t>
+            </a:r>
+            <a:r>
+              <a:rPr dirty="0"/>
+              <a:t> AUPRC would be substantially lower in absolute terms than the AUROC suggests. The takeaway is the comparison between the two models, not the absolute performance on either subtype.</a:t>
             </a:r>
           </a:p>
         </p:txBody>
@@ -4493,7 +4783,7 @@
         <p:spPr>
           <a:xfrm>
             <a:off x="914400" y="1920240"/>
-            <a:ext cx="10360152" cy="1906548"/>
+            <a:ext cx="10360152" cy="2418483"/>
           </a:xfrm>
           <a:prstGeom prst="rect">
             <a:avLst/>
@@ -4544,6 +4834,32 @@
               <a:rPr dirty="0"/>
               <a:t>Deep Learning in Genomics — Spring 2026</a:t>
             </a:r>
+            <a:endParaRPr lang="en-US" dirty="0"/>
+          </a:p>
+          <a:p>
+            <a:pPr algn="ctr">
+              <a:lnSpc>
+                <a:spcPct val="120000"/>
+              </a:lnSpc>
+              <a:spcBef>
+                <a:spcPts val="1400"/>
+              </a:spcBef>
+              <a:spcAft>
+                <a:spcPts val="0"/>
+              </a:spcAft>
+              <a:defRPr sz="1800" b="0" i="0">
+                <a:latin typeface="Calibri"/>
+              </a:defRPr>
+            </a:pPr>
+            <a:r>
+              <a:rPr lang="en-US"/>
+              <a:t>Haoyang </a:t>
+            </a:r>
+            <a:r>
+              <a:rPr lang="en-US" dirty="0"/>
+              <a:t>Hu</a:t>
+            </a:r>
+            <a:endParaRPr dirty="0"/>
           </a:p>
           <a:p>
             <a:pPr algn="ctr">
@@ -4650,8 +4966,8 @@
         </p:blipFill>
         <p:spPr>
           <a:xfrm>
-            <a:off x="274320" y="1005840"/>
-            <a:ext cx="4572000" cy="4627733"/>
+            <a:off x="274320" y="820732"/>
+            <a:ext cx="4754880" cy="4812842"/>
           </a:xfrm>
           <a:prstGeom prst="rect">
             <a:avLst/>
@@ -7258,8 +7574,10 @@
               </a:defRPr>
             </a:pPr>
             <a:r>
-              <a:t>Original purpose</a:t>
-            </a:r>
+              <a:rPr lang="en-US" dirty="0"/>
+              <a:t>Puffin-D’s Purpose</a:t>
+            </a:r>
+            <a:endParaRPr dirty="0"/>
           </a:p>
         </p:txBody>
       </p:sp>
@@ -7349,7 +7667,18 @@
             </a:r>
             <a:r>
               <a:rPr dirty="0"/>
-              <a:t>) and broader compositional patterns (CpG islands, GC content)</a:t>
+              <a:t>) and broader</a:t>
+            </a:r>
+            <a:br>
+              <a:rPr lang="en-US" dirty="0"/>
+            </a:br>
+            <a:r>
+              <a:rPr lang="zh-CN" altLang="en-US" dirty="0"/>
+              <a:t>      </a:t>
+            </a:r>
+            <a:r>
+              <a:rPr dirty="0"/>
+              <a:t>compositional patterns (CpG islands, GC content)</a:t>
             </a:r>
           </a:p>
         </p:txBody>
@@ -9006,7 +9335,7 @@
             </a:pPr>
             <a:r>
               <a:rPr sz="2400" dirty="0"/>
-              <a:t>Per-base AUPRC: tracks precision-recall tradeoff. More honest given 1.3% positive rate</a:t>
+              <a:t>Per-base AUPRC: tracks precision-recall tradeoff. </a:t>
             </a:r>
           </a:p>
           <a:p>
@@ -9236,7 +9565,7 @@
         <p:spPr>
           <a:xfrm>
             <a:off x="457199" y="1955102"/>
-            <a:ext cx="3749039" cy="2743200"/>
+            <a:ext cx="3749039" cy="2386294"/>
           </a:xfrm>
           <a:prstGeom prst="rect">
             <a:avLst/>
@@ -9264,7 +9593,7 @@
               </a:defRPr>
             </a:pPr>
             <a:r>
-              <a:rPr dirty="0"/>
+              <a:rPr sz="2000" dirty="0"/>
               <a:t>•   Left: training loss vs epoch (lower = better)</a:t>
             </a:r>
           </a:p>
@@ -9284,7 +9613,7 @@
               </a:defRPr>
             </a:pPr>
             <a:r>
-              <a:rPr dirty="0"/>
+              <a:rPr sz="2000" dirty="0"/>
               <a:t>•   Right: validation AUROC vs epoch (higher = better)</a:t>
             </a:r>
           </a:p>
@@ -9304,7 +9633,7 @@
               </a:defRPr>
             </a:pPr>
             <a:r>
-              <a:rPr dirty="0"/>
+              <a:rPr sz="2000" dirty="0"/>
               <a:t>•   Pretrained converges ~5x faster than from-scratch</a:t>
             </a:r>
           </a:p>
@@ -9344,13 +9673,13 @@
               </a:spcAft>
             </a:pPr>
             <a:r>
-              <a:rPr sz="2200" b="1">
+              <a:rPr sz="2200" b="1" dirty="0">
                 <a:latin typeface="Calibri"/>
               </a:rPr>
               <a:t>Takeaway: </a:t>
             </a:r>
             <a:r>
-              <a:rPr sz="2200" b="0">
+              <a:rPr sz="2200" b="0" dirty="0">
                 <a:latin typeface="Calibri"/>
               </a:rPr>
               <a:t>pretraining gives both a substantial speedup and a clearly lower training loss from epoch 0.</a:t>
@@ -10147,8 +10476,8 @@
         </p:nvSpPr>
         <p:spPr>
           <a:xfrm>
-            <a:off x="457200" y="4196918"/>
-            <a:ext cx="3598025" cy="520784"/>
+            <a:off x="204185" y="4223139"/>
+            <a:ext cx="4199467" cy="592150"/>
           </a:xfrm>
           <a:prstGeom prst="rect">
             <a:avLst/>
@@ -10176,23 +10505,23 @@
               </a:defRPr>
             </a:pPr>
             <a:r>
-              <a:rPr dirty="0"/>
+              <a:rPr sz="1400" dirty="0"/>
               <a:t>Axes: AUROC on y, enhancer subtype (</a:t>
             </a:r>
             <a:r>
-              <a:rPr dirty="0" err="1"/>
+              <a:rPr sz="1400" dirty="0" err="1"/>
               <a:t>pELS</a:t>
             </a:r>
             <a:r>
-              <a:rPr dirty="0"/>
+              <a:rPr sz="1400" dirty="0"/>
               <a:t> / </a:t>
             </a:r>
             <a:r>
-              <a:rPr dirty="0" err="1"/>
+              <a:rPr sz="1400" dirty="0" err="1"/>
               <a:t>dELS</a:t>
             </a:r>
             <a:r>
-              <a:rPr dirty="0"/>
+              <a:rPr sz="1400" dirty="0"/>
               <a:t>) on x.</a:t>
             </a:r>
           </a:p>
@@ -10212,7 +10541,7 @@
               </a:defRPr>
             </a:pPr>
             <a:r>
-              <a:rPr dirty="0"/>
+              <a:rPr sz="1400" dirty="0"/>
               <a:t>Higher bars = better discrimination on that subtype.</a:t>
             </a:r>
           </a:p>
@@ -10226,8 +10555,8 @@
         </p:nvSpPr>
         <p:spPr>
           <a:xfrm>
-            <a:off x="7334166" y="4196918"/>
-            <a:ext cx="6295644" cy="640080"/>
+            <a:off x="6690700" y="4211303"/>
+            <a:ext cx="6295644" cy="592150"/>
           </a:xfrm>
           <a:prstGeom prst="rect">
             <a:avLst/>
@@ -10255,7 +10584,7 @@
               </a:defRPr>
             </a:pPr>
             <a:r>
-              <a:rPr dirty="0"/>
+              <a:rPr sz="1400" dirty="0"/>
               <a:t>Axes: threshold on x, precision (left subplot) and recall (right subplot) on y.</a:t>
             </a:r>
           </a:p>
@@ -10275,7 +10604,7 @@
               </a:defRPr>
             </a:pPr>
             <a:r>
-              <a:rPr dirty="0"/>
+              <a:rPr sz="1400" dirty="0"/>
               <a:t>Lines show how each metric changes as threshold sweeps from 0.1 to 0.9.</a:t>
             </a:r>
           </a:p>
@@ -10289,7 +10618,7 @@
         </p:nvSpPr>
         <p:spPr>
           <a:xfrm>
-            <a:off x="502919" y="4892040"/>
+            <a:off x="457200" y="5229851"/>
             <a:ext cx="11155680" cy="1554480"/>
           </a:xfrm>
           <a:prstGeom prst="rect">
